--- a/docs/presentation/スロットアプリ開発.pptx
+++ b/docs/presentation/スロットアプリ開発.pptx
@@ -9723,8 +9723,8 @@
         </p:nvSpPr>
         <p:spPr>
           <a:xfrm>
-            <a:off x="320040" y="2651760"/>
-            <a:ext cx="5623560" cy="3703320"/>
+            <a:off x="320040" y="2606040"/>
+            <a:ext cx="5623560" cy="3200400"/>
           </a:xfrm>
           <a:prstGeom prst="rect">
             <a:avLst/>
@@ -9767,8 +9767,8 @@
         </p:nvSpPr>
         <p:spPr>
           <a:xfrm>
-            <a:off x="548640" y="2761488"/>
-            <a:ext cx="5212080" cy="3474720"/>
+            <a:off x="548640" y="2715768"/>
+            <a:ext cx="5212080" cy="3017520"/>
           </a:xfrm>
           <a:prstGeom prst="rect">
             <a:avLst/>
@@ -9800,11 +9800,11 @@
           <a:p>
             <a:pPr algn="l">
               <a:spcAft>
-                <a:spcPts val="437"/>
-              </a:spcAft>
-            </a:pPr>
-            <a:r>
-              <a:rPr sz="1250" b="0">
+                <a:spcPts val="419"/>
+              </a:spcAft>
+            </a:pPr>
+            <a:r>
+              <a:rPr sz="1200" b="0">
                 <a:solidFill>
                   <a:srgbClr val="F2EFE6"/>
                 </a:solidFill>
@@ -9817,11 +9817,11 @@
           <a:p>
             <a:pPr algn="l">
               <a:spcAft>
-                <a:spcPts val="437"/>
-              </a:spcAft>
-            </a:pPr>
-            <a:r>
-              <a:rPr sz="1250" b="0">
+                <a:spcPts val="419"/>
+              </a:spcAft>
+            </a:pPr>
+            <a:r>
+              <a:rPr sz="1200" b="0">
                 <a:solidFill>
                   <a:srgbClr val="F2EFE6"/>
                 </a:solidFill>
@@ -9834,11 +9834,11 @@
           <a:p>
             <a:pPr algn="l">
               <a:spcAft>
-                <a:spcPts val="437"/>
-              </a:spcAft>
-            </a:pPr>
-            <a:r>
-              <a:rPr sz="1250" b="0">
+                <a:spcPts val="419"/>
+              </a:spcAft>
+            </a:pPr>
+            <a:r>
+              <a:rPr sz="1200" b="0">
                 <a:solidFill>
                   <a:srgbClr val="F2EFE6"/>
                 </a:solidFill>
@@ -9851,11 +9851,11 @@
           <a:p>
             <a:pPr algn="l">
               <a:spcAft>
-                <a:spcPts val="437"/>
-              </a:spcAft>
-            </a:pPr>
-            <a:r>
-              <a:rPr sz="1250" b="0">
+                <a:spcPts val="419"/>
+              </a:spcAft>
+            </a:pPr>
+            <a:r>
+              <a:rPr sz="1200" b="0">
                 <a:solidFill>
                   <a:srgbClr val="F2EFE6"/>
                 </a:solidFill>
@@ -9875,8 +9875,8 @@
         </p:nvSpPr>
         <p:spPr>
           <a:xfrm>
-            <a:off x="6217920" y="2651760"/>
-            <a:ext cx="5623560" cy="3703320"/>
+            <a:off x="6217920" y="2606040"/>
+            <a:ext cx="5623560" cy="3200400"/>
           </a:xfrm>
           <a:prstGeom prst="rect">
             <a:avLst/>
@@ -9919,8 +9919,8 @@
         </p:nvSpPr>
         <p:spPr>
           <a:xfrm>
-            <a:off x="6446520" y="2761488"/>
-            <a:ext cx="5212080" cy="3474720"/>
+            <a:off x="6446520" y="2715768"/>
+            <a:ext cx="5212080" cy="3017520"/>
           </a:xfrm>
           <a:prstGeom prst="rect">
             <a:avLst/>
@@ -9952,86 +9952,189 @@
           <a:p>
             <a:pPr algn="l">
               <a:spcAft>
+                <a:spcPts val="419"/>
+              </a:spcAft>
+            </a:pPr>
+            <a:r>
+              <a:rPr sz="1200" b="0">
+                <a:solidFill>
+                  <a:srgbClr val="F2EFE6"/>
+                </a:solidFill>
+                <a:latin typeface="Noto Sans CJK JP"/>
+                <a:ea typeface="Noto Sans CJK JP"/>
+              </a:rPr>
+              <a:t>・支給アニメ素材を参照画像・参照動画として GPT Image 2 / Seedance へ連鎖 → 作風を維持した新規カットを自動生成</a:t>
+            </a:r>
+          </a:p>
+          <a:p>
+            <a:pPr algn="l">
+              <a:spcAft>
+                <a:spcPts val="419"/>
+              </a:spcAft>
+            </a:pPr>
+            <a:r>
+              <a:rPr sz="1200" b="0">
+                <a:solidFill>
+                  <a:srgbClr val="F2EFE6"/>
+                </a:solidFill>
+                <a:latin typeface="Noto Sans CJK JP"/>
+                <a:ea typeface="Noto Sans CJK JP"/>
+              </a:rPr>
+              <a:t>・原作の名場面・キャラ相関から、予告体系・振分けテーブルなど演出仕様自体をエージェントが自動起案</a:t>
+            </a:r>
+          </a:p>
+          <a:p>
+            <a:pPr algn="l">
+              <a:spcAft>
+                <a:spcPts val="419"/>
+              </a:spcAft>
+            </a:pPr>
+            <a:r>
+              <a:rPr sz="1200" b="0">
+                <a:solidFill>
+                  <a:srgbClr val="F2EFE6"/>
+                </a:solidFill>
+                <a:latin typeface="Noto Sans CJK JP"/>
+                <a:ea typeface="Noto Sans CJK JP"/>
+              </a:rPr>
+              <a:t>・設定資料との一致検品(顔・衣装・色)を自動化し、監修往復を削減</a:t>
+            </a:r>
+          </a:p>
+          <a:p>
+            <a:pPr algn="l">
+              <a:spcAft>
+                <a:spcPts val="419"/>
+              </a:spcAft>
+            </a:pPr>
+            <a:r>
+              <a:rPr sz="1200" b="0">
+                <a:solidFill>
+                  <a:srgbClr val="F2EFE6"/>
+                </a:solidFill>
+                <a:latin typeface="Noto Sans CJK JP"/>
+                <a:ea typeface="Noto Sans CJK JP"/>
+              </a:rPr>
+              <a:t>・仕様書(Excel)→ SPEC 転記 → 実装 → 網羅テストの今回の流れをテンプレ化し、機種横断で再利用</a:t>
+            </a:r>
+          </a:p>
+          <a:p>
+            <a:pPr algn="l">
+              <a:spcAft>
+                <a:spcPts val="402"/>
+              </a:spcAft>
+            </a:pPr>
+            <a:r>
+              <a:rPr sz="1150" b="0">
+                <a:solidFill>
+                  <a:srgbClr val="B9B2C8"/>
+                </a:solidFill>
+                <a:latin typeface="Noto Sans CJK JP"/>
+                <a:ea typeface="Noto Sans CJK JP"/>
+              </a:rPr>
+              <a:t>※ 版権素材の権利処理と最終監修は人間の承認が必須</a:t>
+            </a:r>
+          </a:p>
+        </p:txBody>
+      </p:sp>
+      <p:sp>
+        <p:nvSpPr>
+          <p:cNvPr id="14" name="Rectangle 13"/>
+          <p:cNvSpPr/>
+          <p:nvPr/>
+        </p:nvSpPr>
+        <p:spPr>
+          <a:xfrm>
+            <a:off x="320040" y="5943600"/>
+            <a:ext cx="11551615" cy="777240"/>
+          </a:xfrm>
+          <a:prstGeom prst="rect">
+            <a:avLst/>
+          </a:prstGeom>
+          <a:solidFill>
+            <a:srgbClr val="2B2440"/>
+          </a:solidFill>
+          <a:ln w="12700">
+            <a:solidFill>
+              <a:srgbClr val="D9B44A"/>
+            </a:solidFill>
+          </a:ln>
+          <a:effectLst/>
+        </p:spPr>
+        <p:style>
+          <a:lnRef idx="1">
+            <a:schemeClr val="accent1"/>
+          </a:lnRef>
+          <a:fillRef idx="3">
+            <a:schemeClr val="accent1"/>
+          </a:fillRef>
+          <a:effectRef idx="2">
+            <a:schemeClr val="accent1"/>
+          </a:effectRef>
+          <a:fontRef idx="minor">
+            <a:schemeClr val="lt1"/>
+          </a:fontRef>
+        </p:style>
+        <p:txBody>
+          <a:bodyPr rtlCol="0" anchor="ctr"/>
+          <a:lstStyle/>
+          <a:p>
+            <a:pPr algn="ctr"/>
+          </a:p>
+        </p:txBody>
+      </p:sp>
+      <p:sp>
+        <p:nvSpPr>
+          <p:cNvPr id="15" name="TextBox 14"/>
+          <p:cNvSpPr txBox="1"/>
+          <p:nvPr/>
+        </p:nvSpPr>
+        <p:spPr>
+          <a:xfrm>
+            <a:off x="548640" y="5998464"/>
+            <a:ext cx="11094415" cy="685800"/>
+          </a:xfrm>
+          <a:prstGeom prst="rect">
+            <a:avLst/>
+          </a:prstGeom>
+          <a:noFill/>
+        </p:spPr>
+        <p:txBody>
+          <a:bodyPr wrap="square" anchor="t">
+            <a:spAutoFit/>
+          </a:bodyPr>
+          <a:lstStyle/>
+          <a:p>
+            <a:pPr algn="l">
+              <a:spcAft>
                 <a:spcPts val="437"/>
               </a:spcAft>
             </a:pPr>
             <a:r>
-              <a:rPr sz="1250" b="0">
-                <a:solidFill>
-                  <a:srgbClr val="F2EFE6"/>
-                </a:solidFill>
-                <a:latin typeface="Noto Sans CJK JP"/>
-                <a:ea typeface="Noto Sans CJK JP"/>
-              </a:rPr>
-              <a:t>・支給アニメ素材を参照画像・参照動画として GPT Image 2 / Seedance へ連鎖 → 作風を維持した新規カットを自動生成</a:t>
+              <a:rPr sz="1250" b="1">
+                <a:solidFill>
+                  <a:srgbClr val="E8A83C"/>
+                </a:solidFill>
+                <a:latin typeface="Noto Sans CJK JP"/>
+                <a:ea typeface="Noto Sans CJK JP"/>
+              </a:rPr>
+              <a:t>日程感(目安): 生成パイプライン試作(PoC)約 1〜2 ヶ月 → 1 機種分の演出・仕様自動起案の実証 約 2〜3 ヶ月 → テンプレ化・横展開 約 1 ヶ月(計 約 4〜6 ヶ月)</a:t>
             </a:r>
           </a:p>
           <a:p>
             <a:pPr algn="l">
               <a:spcAft>
-                <a:spcPts val="437"/>
-              </a:spcAft>
-            </a:pPr>
-            <a:r>
-              <a:rPr sz="1250" b="0">
-                <a:solidFill>
-                  <a:srgbClr val="F2EFE6"/>
-                </a:solidFill>
-                <a:latin typeface="Noto Sans CJK JP"/>
-                <a:ea typeface="Noto Sans CJK JP"/>
-              </a:rPr>
-              <a:t>・原作の名場面・キャラ相関から、予告体系・振分けテーブルなど演出仕様自体をエージェントが自動起案</a:t>
-            </a:r>
-          </a:p>
-          <a:p>
-            <a:pPr algn="l">
-              <a:spcAft>
-                <a:spcPts val="437"/>
-              </a:spcAft>
-            </a:pPr>
-            <a:r>
-              <a:rPr sz="1250" b="0">
-                <a:solidFill>
-                  <a:srgbClr val="F2EFE6"/>
-                </a:solidFill>
-                <a:latin typeface="Noto Sans CJK JP"/>
-                <a:ea typeface="Noto Sans CJK JP"/>
-              </a:rPr>
-              <a:t>・設定資料との一致検品(顔・衣装・色)を自動化し、監修往復を削減</a:t>
-            </a:r>
-          </a:p>
-          <a:p>
-            <a:pPr algn="l">
-              <a:spcAft>
-                <a:spcPts val="437"/>
-              </a:spcAft>
-            </a:pPr>
-            <a:r>
-              <a:rPr sz="1250" b="0">
-                <a:solidFill>
-                  <a:srgbClr val="F2EFE6"/>
-                </a:solidFill>
-                <a:latin typeface="Noto Sans CJK JP"/>
-                <a:ea typeface="Noto Sans CJK JP"/>
-              </a:rPr>
-              <a:t>・仕様書(Excel)→ SPEC 転記 → 実装 → 網羅テストの今回の流れをテンプレ化し、機種横断で再利用</a:t>
-            </a:r>
-          </a:p>
-          <a:p>
-            <a:pPr algn="l">
-              <a:spcAft>
-                <a:spcPts val="419"/>
-              </a:spcAft>
-            </a:pPr>
-            <a:r>
-              <a:rPr sz="1200" b="0">
+                <a:spcPts val="367"/>
+              </a:spcAft>
+            </a:pPr>
+            <a:r>
+              <a:rPr sz="1050" b="0">
                 <a:solidFill>
                   <a:srgbClr val="B9B2C8"/>
                 </a:solidFill>
                 <a:latin typeface="Noto Sans CJK JP"/>
                 <a:ea typeface="Noto Sans CJK JP"/>
               </a:rPr>
-              <a:t>※ 版権素材の権利処理と最終監修は人間の承認が必須</a:t>
+              <a:t>※ 版元の素材支給・監修往復の待ち時間は含まない(ここが実期間の最大変動要因)</a:t>
             </a:r>
           </a:p>
         </p:txBody>
@@ -10319,7 +10422,7 @@
         <p:spPr>
           <a:xfrm>
             <a:off x="320040" y="1097280"/>
-            <a:ext cx="5623560" cy="5257800"/>
+            <a:ext cx="5623560" cy="4709160"/>
           </a:xfrm>
           <a:prstGeom prst="rect">
             <a:avLst/>
@@ -10363,7 +10466,7 @@
         <p:spPr>
           <a:xfrm>
             <a:off x="548640" y="1207008"/>
-            <a:ext cx="5212080" cy="5029200"/>
+            <a:ext cx="5212080" cy="4480560"/>
           </a:xfrm>
           <a:prstGeom prst="rect">
             <a:avLst/>
@@ -10395,11 +10498,11 @@
           <a:p>
             <a:pPr algn="l">
               <a:spcAft>
-                <a:spcPts val="437"/>
-              </a:spcAft>
-            </a:pPr>
-            <a:r>
-              <a:rPr sz="1250" b="0">
+                <a:spcPts val="419"/>
+              </a:spcAft>
+            </a:pPr>
+            <a:r>
+              <a:rPr sz="1200" b="0">
                 <a:solidFill>
                   <a:srgbClr val="F2EFE6"/>
                 </a:solidFill>
@@ -10412,11 +10515,11 @@
           <a:p>
             <a:pPr algn="l">
               <a:spcAft>
-                <a:spcPts val="437"/>
-              </a:spcAft>
-            </a:pPr>
-            <a:r>
-              <a:rPr sz="1250" b="0">
+                <a:spcPts val="419"/>
+              </a:spcAft>
+            </a:pPr>
+            <a:r>
+              <a:rPr sz="1200" b="0">
                 <a:solidFill>
                   <a:srgbClr val="F2EFE6"/>
                 </a:solidFill>
@@ -10429,11 +10532,11 @@
           <a:p>
             <a:pPr algn="l">
               <a:spcAft>
-                <a:spcPts val="437"/>
-              </a:spcAft>
-            </a:pPr>
-            <a:r>
-              <a:rPr sz="1250" b="0">
+                <a:spcPts val="419"/>
+              </a:spcAft>
+            </a:pPr>
+            <a:r>
+              <a:rPr sz="1200" b="0">
                 <a:solidFill>
                   <a:srgbClr val="F2EFE6"/>
                 </a:solidFill>
@@ -10446,11 +10549,11 @@
           <a:p>
             <a:pPr algn="l">
               <a:spcAft>
-                <a:spcPts val="437"/>
-              </a:spcAft>
-            </a:pPr>
-            <a:r>
-              <a:rPr sz="1250" b="0">
+                <a:spcPts val="419"/>
+              </a:spcAft>
+            </a:pPr>
+            <a:r>
+              <a:rPr sz="1200" b="0">
                 <a:solidFill>
                   <a:srgbClr val="F2EFE6"/>
                 </a:solidFill>
@@ -10463,11 +10566,11 @@
           <a:p>
             <a:pPr algn="l">
               <a:spcAft>
-                <a:spcPts val="437"/>
-              </a:spcAft>
-            </a:pPr>
-            <a:r>
-              <a:rPr sz="1250" b="0">
+                <a:spcPts val="419"/>
+              </a:spcAft>
+            </a:pPr>
+            <a:r>
+              <a:rPr sz="1200" b="0">
                 <a:solidFill>
                   <a:srgbClr val="F2EFE6"/>
                 </a:solidFill>
@@ -10488,7 +10591,7 @@
         <p:spPr>
           <a:xfrm>
             <a:off x="6217920" y="1097280"/>
-            <a:ext cx="5623560" cy="5257800"/>
+            <a:ext cx="5623560" cy="4709160"/>
           </a:xfrm>
           <a:prstGeom prst="rect">
             <a:avLst/>
@@ -10532,7 +10635,7 @@
         <p:spPr>
           <a:xfrm>
             <a:off x="6446520" y="1207008"/>
-            <a:ext cx="5212080" cy="5029200"/>
+            <a:ext cx="5212080" cy="4480560"/>
           </a:xfrm>
           <a:prstGeom prst="rect">
             <a:avLst/>
@@ -10564,86 +10667,189 @@
           <a:p>
             <a:pPr algn="l">
               <a:spcAft>
+                <a:spcPts val="419"/>
+              </a:spcAft>
+            </a:pPr>
+            <a:r>
+              <a:rPr sz="1200" b="0">
+                <a:solidFill>
+                  <a:srgbClr val="F2EFE6"/>
+                </a:solidFill>
+                <a:latin typeface="Noto Sans CJK JP"/>
+                <a:ea typeface="Noto Sans CJK JP"/>
+              </a:rPr>
+              <a:t>・① コアロジック(役抽せん・リール制御・出玉)を TypeScript → C 言語へ移植。既存の網羅テスト・100 万 G シミュレーションを同値性検証ベクタとして流用</a:t>
+            </a:r>
+          </a:p>
+          <a:p>
+            <a:pPr algn="l">
+              <a:spcAft>
+                <a:spcPts val="419"/>
+              </a:spcAft>
+            </a:pPr>
+            <a:r>
+              <a:rPr sz="1200" b="0">
+                <a:solidFill>
+                  <a:srgbClr val="F2EFE6"/>
+                </a:solidFill>
+                <a:latin typeface="Noto Sans CJK JP"/>
+                <a:ea typeface="Noto Sans CJK JP"/>
+              </a:rPr>
+              <a:t>・② メイン基板相当部は容量削減の上でアセンブラ化を検討(抽せんテーブルの分母付き整数設計はそのまま活かせる)</a:t>
+            </a:r>
+          </a:p>
+          <a:p>
+            <a:pPr algn="l">
+              <a:spcAft>
+                <a:spcPts val="419"/>
+              </a:spcAft>
+            </a:pPr>
+            <a:r>
+              <a:rPr sz="1200" b="0">
+                <a:solidFill>
+                  <a:srgbClr val="F2EFE6"/>
+                </a:solidFill>
+                <a:latin typeface="Noto Sans CJK JP"/>
+                <a:ea typeface="Noto Sans CJK JP"/>
+              </a:rPr>
+              <a:t>・③ 自動変換ツール(ts2c 等)は ES3 の約 70% 対応・16bit 整数のみで実用性が限定的 → AI エージェントによる移植 + テスト同値性検証が現実的</a:t>
+            </a:r>
+          </a:p>
+          <a:p>
+            <a:pPr algn="l">
+              <a:spcAft>
+                <a:spcPts val="419"/>
+              </a:spcAft>
+            </a:pPr>
+            <a:r>
+              <a:rPr sz="1200" b="0">
+                <a:solidFill>
+                  <a:srgbClr val="F2EFE6"/>
+                </a:solidFill>
+                <a:latin typeface="Noto Sans CJK JP"/>
+                <a:ea typeface="Noto Sans CJK JP"/>
+              </a:rPr>
+              <a:t>・④ 演出層はデータ駆動設計(direction.ts の対応表)のため、サブ基板向け演出データテーブルへ変換しやすい</a:t>
+            </a:r>
+          </a:p>
+          <a:p>
+            <a:pPr algn="l">
+              <a:spcAft>
+                <a:spcPts val="419"/>
+              </a:spcAft>
+            </a:pPr>
+            <a:r>
+              <a:rPr sz="1200" b="0">
+                <a:solidFill>
+                  <a:srgbClr val="F2EFE6"/>
+                </a:solidFill>
+                <a:latin typeface="Noto Sans CJK JP"/>
+                <a:ea typeface="Noto Sans CJK JP"/>
+              </a:rPr>
+              <a:t>・⑤ 液晶素材の実機フォーマット変換 → 評価ボードでの動作確認へ段階的に進める</a:t>
+            </a:r>
+          </a:p>
+        </p:txBody>
+      </p:sp>
+      <p:sp>
+        <p:nvSpPr>
+          <p:cNvPr id="12" name="Rectangle 11"/>
+          <p:cNvSpPr/>
+          <p:nvPr/>
+        </p:nvSpPr>
+        <p:spPr>
+          <a:xfrm>
+            <a:off x="320040" y="5897880"/>
+            <a:ext cx="11551615" cy="822960"/>
+          </a:xfrm>
+          <a:prstGeom prst="rect">
+            <a:avLst/>
+          </a:prstGeom>
+          <a:solidFill>
+            <a:srgbClr val="2B2440"/>
+          </a:solidFill>
+          <a:ln w="12700">
+            <a:solidFill>
+              <a:srgbClr val="D9B44A"/>
+            </a:solidFill>
+          </a:ln>
+          <a:effectLst/>
+        </p:spPr>
+        <p:style>
+          <a:lnRef idx="1">
+            <a:schemeClr val="accent1"/>
+          </a:lnRef>
+          <a:fillRef idx="3">
+            <a:schemeClr val="accent1"/>
+          </a:fillRef>
+          <a:effectRef idx="2">
+            <a:schemeClr val="accent1"/>
+          </a:effectRef>
+          <a:fontRef idx="minor">
+            <a:schemeClr val="lt1"/>
+          </a:fontRef>
+        </p:style>
+        <p:txBody>
+          <a:bodyPr rtlCol="0" anchor="ctr"/>
+          <a:lstStyle/>
+          <a:p>
+            <a:pPr algn="ctr"/>
+          </a:p>
+        </p:txBody>
+      </p:sp>
+      <p:sp>
+        <p:nvSpPr>
+          <p:cNvPr id="13" name="TextBox 12"/>
+          <p:cNvSpPr txBox="1"/>
+          <p:nvPr/>
+        </p:nvSpPr>
+        <p:spPr>
+          <a:xfrm>
+            <a:off x="548640" y="5952744"/>
+            <a:ext cx="11094415" cy="731520"/>
+          </a:xfrm>
+          <a:prstGeom prst="rect">
+            <a:avLst/>
+          </a:prstGeom>
+          <a:noFill/>
+        </p:spPr>
+        <p:txBody>
+          <a:bodyPr wrap="square" anchor="t">
+            <a:spAutoFit/>
+          </a:bodyPr>
+          <a:lstStyle/>
+          <a:p>
+            <a:pPr algn="l">
+              <a:spcAft>
                 <a:spcPts val="437"/>
               </a:spcAft>
             </a:pPr>
             <a:r>
-              <a:rPr sz="1250" b="0">
-                <a:solidFill>
-                  <a:srgbClr val="F2EFE6"/>
-                </a:solidFill>
-                <a:latin typeface="Noto Sans CJK JP"/>
-                <a:ea typeface="Noto Sans CJK JP"/>
-              </a:rPr>
-              <a:t>・① コアロジック(役抽せん・リール制御・出玉)を TypeScript → C 言語へ移植。既存の網羅テスト・100 万 G シミュレーションを同値性検証ベクタとして流用</a:t>
+              <a:rPr sz="1250" b="1">
+                <a:solidFill>
+                  <a:srgbClr val="E8A83C"/>
+                </a:solidFill>
+                <a:latin typeface="Noto Sans CJK JP"/>
+                <a:ea typeface="Noto Sans CJK JP"/>
+              </a:rPr>
+              <a:t>日程感(目安): ① C 言語移植 + 同値性検証 約 2〜3 ヶ月 → ② アセンブラ化・容量最適化(16KB/1KB 適合)約 3〜6 ヶ月 → ⑤ 評価ボード動作確認まで 通算 約 6 ヶ月〜1 年</a:t>
             </a:r>
           </a:p>
           <a:p>
             <a:pPr algn="l">
               <a:spcAft>
-                <a:spcPts val="437"/>
-              </a:spcAft>
-            </a:pPr>
-            <a:r>
-              <a:rPr sz="1250" b="0">
-                <a:solidFill>
-                  <a:srgbClr val="F2EFE6"/>
-                </a:solidFill>
-                <a:latin typeface="Noto Sans CJK JP"/>
-                <a:ea typeface="Noto Sans CJK JP"/>
-              </a:rPr>
-              <a:t>・② メイン基板相当部は容量削減の上でアセンブラ化を検討(抽せんテーブルの分母付き整数設計はそのまま活かせる)</a:t>
-            </a:r>
-          </a:p>
-          <a:p>
-            <a:pPr algn="l">
-              <a:spcAft>
-                <a:spcPts val="437"/>
-              </a:spcAft>
-            </a:pPr>
-            <a:r>
-              <a:rPr sz="1250" b="0">
-                <a:solidFill>
-                  <a:srgbClr val="F2EFE6"/>
-                </a:solidFill>
-                <a:latin typeface="Noto Sans CJK JP"/>
-                <a:ea typeface="Noto Sans CJK JP"/>
-              </a:rPr>
-              <a:t>・③ 自動変換ツール(ts2c 等)は ES3 の約 70% 対応・16bit 整数のみで実用性が限定的 → AI エージェントによる移植 + テスト同値性検証が現実的</a:t>
-            </a:r>
-          </a:p>
-          <a:p>
-            <a:pPr algn="l">
-              <a:spcAft>
-                <a:spcPts val="437"/>
-              </a:spcAft>
-            </a:pPr>
-            <a:r>
-              <a:rPr sz="1250" b="0">
-                <a:solidFill>
-                  <a:srgbClr val="F2EFE6"/>
-                </a:solidFill>
-                <a:latin typeface="Noto Sans CJK JP"/>
-                <a:ea typeface="Noto Sans CJK JP"/>
-              </a:rPr>
-              <a:t>・④ 演出層はデータ駆動設計(direction.ts の対応表)のため、サブ基板向け演出データテーブルへ変換しやすい</a:t>
-            </a:r>
-          </a:p>
-          <a:p>
-            <a:pPr algn="l">
-              <a:spcAft>
-                <a:spcPts val="437"/>
-              </a:spcAft>
-            </a:pPr>
-            <a:r>
-              <a:rPr sz="1250" b="0">
-                <a:solidFill>
-                  <a:srgbClr val="F2EFE6"/>
-                </a:solidFill>
-                <a:latin typeface="Noto Sans CJK JP"/>
-                <a:ea typeface="Noto Sans CJK JP"/>
-              </a:rPr>
-              <a:t>・⑤ 液晶素材の実機フォーマット変換 → 評価ボードでの動作確認へ段階的に進める</a:t>
+                <a:spcPts val="367"/>
+              </a:spcAft>
+            </a:pPr>
+            <a:r>
+              <a:rPr sz="1050" b="0">
+                <a:solidFill>
+                  <a:srgbClr val="B9B2C8"/>
+                </a:solidFill>
+                <a:latin typeface="Noto Sans CJK JP"/>
+                <a:ea typeface="Noto Sans CJK JP"/>
+              </a:rPr>
+              <a:t>※ 実機ハード(基板・リールユニット)の調達と型式試験対応はメーカー協業が前提のため別枠(試験申請〜結果通知だけで数ヶ月規模)</a:t>
             </a:r>
           </a:p>
         </p:txBody>

--- a/docs/presentation/スロットアプリ開発.pptx
+++ b/docs/presentation/スロットアプリ開発.pptx
@@ -15,6 +15,7 @@
     <p:sldId id="263" r:id="rId14"/>
     <p:sldId id="264" r:id="rId15"/>
     <p:sldId id="265" r:id="rId16"/>
+    <p:sldId id="266" r:id="rId17"/>
   </p:sldIdLst>
   <p:sldSz cx="12191695" cy="6858000" type="screen4x3"/>
   <p:notesSz cx="6858000" cy="9144000"/>
@@ -3646,6 +3647,2417 @@
                 <a:latin typeface="Noto Sans CJK JP"/>
                 <a:ea typeface="Noto Sans CJK JP"/>
               </a:rPr>
+              <a:t>今後の作業(応用)③ 素材受領 → 実機デモまでの日数</a:t>
+            </a:r>
+          </a:p>
+        </p:txBody>
+      </p:sp>
+      <p:sp>
+        <p:nvSpPr>
+          <p:cNvPr id="7" name="TextBox 6"/>
+          <p:cNvSpPr txBox="1"/>
+          <p:nvPr/>
+        </p:nvSpPr>
+        <p:spPr>
+          <a:xfrm>
+            <a:off x="7498079" y="73152"/>
+            <a:ext cx="4389120" cy="731520"/>
+          </a:xfrm>
+          <a:prstGeom prst="rect">
+            <a:avLst/>
+          </a:prstGeom>
+          <a:noFill/>
+        </p:spPr>
+        <p:txBody>
+          <a:bodyPr wrap="square" anchor="ctr">
+            <a:spAutoFit/>
+          </a:bodyPr>
+          <a:lstStyle/>
+          <a:p>
+            <a:pPr algn="r">
+              <a:spcAft>
+                <a:spcPts val="419"/>
+              </a:spcAft>
+            </a:pPr>
+            <a:r>
+              <a:rPr sz="1200" b="0">
+                <a:solidFill>
+                  <a:srgbClr val="B9B2C8"/>
+                </a:solidFill>
+                <a:latin typeface="Noto Sans CJK JP"/>
+                <a:ea typeface="Noto Sans CJK JP"/>
+              </a:rPr>
+              <a:t>①②が確立した後のリードタイム試算</a:t>
+            </a:r>
+          </a:p>
+        </p:txBody>
+      </p:sp>
+      <p:sp>
+        <p:nvSpPr>
+          <p:cNvPr id="8" name="Rectangle 7"/>
+          <p:cNvSpPr/>
+          <p:nvPr/>
+        </p:nvSpPr>
+        <p:spPr>
+          <a:xfrm>
+            <a:off x="320040" y="1051560"/>
+            <a:ext cx="11551615" cy="914400"/>
+          </a:xfrm>
+          <a:prstGeom prst="rect">
+            <a:avLst/>
+          </a:prstGeom>
+          <a:solidFill>
+            <a:srgbClr val="221C33"/>
+          </a:solidFill>
+          <a:ln>
+            <a:noFill/>
+          </a:ln>
+          <a:effectLst/>
+        </p:spPr>
+        <p:style>
+          <a:lnRef idx="1">
+            <a:schemeClr val="accent1"/>
+          </a:lnRef>
+          <a:fillRef idx="3">
+            <a:schemeClr val="accent1"/>
+          </a:fillRef>
+          <a:effectRef idx="2">
+            <a:schemeClr val="accent1"/>
+          </a:effectRef>
+          <a:fontRef idx="minor">
+            <a:schemeClr val="lt1"/>
+          </a:fontRef>
+        </p:style>
+        <p:txBody>
+          <a:bodyPr rtlCol="0" anchor="ctr"/>
+          <a:lstStyle/>
+          <a:p>
+            <a:pPr algn="ctr"/>
+          </a:p>
+        </p:txBody>
+      </p:sp>
+      <p:sp>
+        <p:nvSpPr>
+          <p:cNvPr id="9" name="TextBox 8"/>
+          <p:cNvSpPr txBox="1"/>
+          <p:nvPr/>
+        </p:nvSpPr>
+        <p:spPr>
+          <a:xfrm>
+            <a:off x="548640" y="1133856"/>
+            <a:ext cx="11094415" cy="777240"/>
+          </a:xfrm>
+          <a:prstGeom prst="rect">
+            <a:avLst/>
+          </a:prstGeom>
+          <a:noFill/>
+        </p:spPr>
+        <p:txBody>
+          <a:bodyPr wrap="square" anchor="t">
+            <a:spAutoFit/>
+          </a:bodyPr>
+          <a:lstStyle/>
+          <a:p>
+            <a:pPr algn="l">
+              <a:spcAft>
+                <a:spcPts val="525"/>
+              </a:spcAft>
+            </a:pPr>
+            <a:r>
+              <a:rPr sz="1500" b="1">
+                <a:solidFill>
+                  <a:srgbClr val="D9B44A"/>
+                </a:solidFill>
+                <a:latin typeface="Noto Sans CJK JP"/>
+                <a:ea typeface="Noto Sans CJK JP"/>
+              </a:rPr>
+              <a:t>最終目的: 版権取得プレゼンの場で実機が既に動作している状態を作り、完成品をイメージさせる</a:t>
+            </a:r>
+          </a:p>
+          <a:p>
+            <a:pPr algn="l">
+              <a:spcAft>
+                <a:spcPts val="437"/>
+              </a:spcAft>
+            </a:pPr>
+            <a:r>
+              <a:rPr sz="1250" b="0">
+                <a:solidFill>
+                  <a:srgbClr val="F2EFE6"/>
+                </a:solidFill>
+                <a:latin typeface="Noto Sans CJK JP"/>
+                <a:ea typeface="Noto Sans CJK JP"/>
+              </a:rPr>
+              <a:t>ターゲット: アニメ素材の受領から 2 週間で「肝」の動作確認(通常時遊技 + 代表演出 + AT バトル 1 系統。全演出の網羅・完璧さは求めない)</a:t>
+            </a:r>
+          </a:p>
+        </p:txBody>
+      </p:sp>
+      <p:sp>
+        <p:nvSpPr>
+          <p:cNvPr id="10" name="Rectangle 9"/>
+          <p:cNvSpPr/>
+          <p:nvPr/>
+        </p:nvSpPr>
+        <p:spPr>
+          <a:xfrm>
+            <a:off x="320040" y="2103120"/>
+            <a:ext cx="1051560" cy="466344"/>
+          </a:xfrm>
+          <a:prstGeom prst="rect">
+            <a:avLst/>
+          </a:prstGeom>
+          <a:solidFill>
+            <a:srgbClr val="C0302E"/>
+          </a:solidFill>
+          <a:ln>
+            <a:noFill/>
+          </a:ln>
+          <a:effectLst/>
+        </p:spPr>
+        <p:style>
+          <a:lnRef idx="1">
+            <a:schemeClr val="accent1"/>
+          </a:lnRef>
+          <a:fillRef idx="3">
+            <a:schemeClr val="accent1"/>
+          </a:fillRef>
+          <a:effectRef idx="2">
+            <a:schemeClr val="accent1"/>
+          </a:effectRef>
+          <a:fontRef idx="minor">
+            <a:schemeClr val="lt1"/>
+          </a:fontRef>
+        </p:style>
+        <p:txBody>
+          <a:bodyPr rtlCol="0" anchor="ctr"/>
+          <a:lstStyle/>
+          <a:p>
+            <a:pPr algn="ctr"/>
+          </a:p>
+        </p:txBody>
+      </p:sp>
+      <p:sp>
+        <p:nvSpPr>
+          <p:cNvPr id="11" name="TextBox 10"/>
+          <p:cNvSpPr txBox="1"/>
+          <p:nvPr/>
+        </p:nvSpPr>
+        <p:spPr>
+          <a:xfrm>
+            <a:off x="320040" y="2103120"/>
+            <a:ext cx="1051560" cy="466344"/>
+          </a:xfrm>
+          <a:prstGeom prst="rect">
+            <a:avLst/>
+          </a:prstGeom>
+          <a:noFill/>
+        </p:spPr>
+        <p:txBody>
+          <a:bodyPr wrap="square" anchor="ctr">
+            <a:spAutoFit/>
+          </a:bodyPr>
+          <a:lstStyle/>
+          <a:p>
+            <a:pPr algn="ctr">
+              <a:spcAft>
+                <a:spcPts val="384"/>
+              </a:spcAft>
+            </a:pPr>
+            <a:r>
+              <a:rPr sz="1100" b="1">
+                <a:solidFill>
+                  <a:srgbClr val="F2EFE6"/>
+                </a:solidFill>
+                <a:latin typeface="Noto Sans CJK JP"/>
+                <a:ea typeface="Noto Sans CJK JP"/>
+              </a:rPr>
+              <a:t>Day 1</a:t>
+            </a:r>
+          </a:p>
+        </p:txBody>
+      </p:sp>
+      <p:sp>
+        <p:nvSpPr>
+          <p:cNvPr id="12" name="Rectangle 11"/>
+          <p:cNvSpPr/>
+          <p:nvPr/>
+        </p:nvSpPr>
+        <p:spPr>
+          <a:xfrm>
+            <a:off x="1417320" y="2103120"/>
+            <a:ext cx="4983480" cy="466344"/>
+          </a:xfrm>
+          <a:prstGeom prst="rect">
+            <a:avLst/>
+          </a:prstGeom>
+          <a:solidFill>
+            <a:srgbClr val="221C33"/>
+          </a:solidFill>
+          <a:ln>
+            <a:noFill/>
+          </a:ln>
+          <a:effectLst/>
+        </p:spPr>
+        <p:style>
+          <a:lnRef idx="1">
+            <a:schemeClr val="accent1"/>
+          </a:lnRef>
+          <a:fillRef idx="3">
+            <a:schemeClr val="accent1"/>
+          </a:fillRef>
+          <a:effectRef idx="2">
+            <a:schemeClr val="accent1"/>
+          </a:effectRef>
+          <a:fontRef idx="minor">
+            <a:schemeClr val="lt1"/>
+          </a:fontRef>
+        </p:style>
+        <p:txBody>
+          <a:bodyPr rtlCol="0" anchor="ctr"/>
+          <a:lstStyle/>
+          <a:p>
+            <a:pPr algn="ctr"/>
+          </a:p>
+        </p:txBody>
+      </p:sp>
+      <p:sp>
+        <p:nvSpPr>
+          <p:cNvPr id="13" name="TextBox 12"/>
+          <p:cNvSpPr txBox="1"/>
+          <p:nvPr/>
+        </p:nvSpPr>
+        <p:spPr>
+          <a:xfrm>
+            <a:off x="1527048" y="2103120"/>
+            <a:ext cx="4846320" cy="466344"/>
+          </a:xfrm>
+          <a:prstGeom prst="rect">
+            <a:avLst/>
+          </a:prstGeom>
+          <a:noFill/>
+        </p:spPr>
+        <p:txBody>
+          <a:bodyPr wrap="square" anchor="ctr">
+            <a:spAutoFit/>
+          </a:bodyPr>
+          <a:lstStyle/>
+          <a:p>
+            <a:pPr algn="l">
+              <a:spcAft>
+                <a:spcPts val="367"/>
+              </a:spcAft>
+            </a:pPr>
+            <a:r>
+              <a:rPr sz="1050" b="0">
+                <a:solidFill>
+                  <a:srgbClr val="F2EFE6"/>
+                </a:solidFill>
+                <a:latin typeface="Noto Sans CJK JP"/>
+                <a:ea typeface="Noto Sans CJK JP"/>
+              </a:rPr>
+              <a:t>素材の受領・検品・参照資料整備(設定資料ペア化)</a:t>
+            </a:r>
+          </a:p>
+        </p:txBody>
+      </p:sp>
+      <p:sp>
+        <p:nvSpPr>
+          <p:cNvPr id="14" name="Rectangle 13"/>
+          <p:cNvSpPr/>
+          <p:nvPr/>
+        </p:nvSpPr>
+        <p:spPr>
+          <a:xfrm>
+            <a:off x="6446520" y="2103120"/>
+            <a:ext cx="685800" cy="466344"/>
+          </a:xfrm>
+          <a:prstGeom prst="rect">
+            <a:avLst/>
+          </a:prstGeom>
+          <a:solidFill>
+            <a:srgbClr val="2B2440"/>
+          </a:solidFill>
+          <a:ln>
+            <a:noFill/>
+          </a:ln>
+          <a:effectLst/>
+        </p:spPr>
+        <p:style>
+          <a:lnRef idx="1">
+            <a:schemeClr val="accent1"/>
+          </a:lnRef>
+          <a:fillRef idx="3">
+            <a:schemeClr val="accent1"/>
+          </a:fillRef>
+          <a:effectRef idx="2">
+            <a:schemeClr val="accent1"/>
+          </a:effectRef>
+          <a:fontRef idx="minor">
+            <a:schemeClr val="lt1"/>
+          </a:fontRef>
+        </p:style>
+        <p:txBody>
+          <a:bodyPr rtlCol="0" anchor="ctr"/>
+          <a:lstStyle/>
+          <a:p>
+            <a:pPr algn="ctr"/>
+          </a:p>
+        </p:txBody>
+      </p:sp>
+      <p:sp>
+        <p:nvSpPr>
+          <p:cNvPr id="15" name="TextBox 14"/>
+          <p:cNvSpPr txBox="1"/>
+          <p:nvPr/>
+        </p:nvSpPr>
+        <p:spPr>
+          <a:xfrm>
+            <a:off x="6446520" y="2103120"/>
+            <a:ext cx="685800" cy="466344"/>
+          </a:xfrm>
+          <a:prstGeom prst="rect">
+            <a:avLst/>
+          </a:prstGeom>
+          <a:noFill/>
+        </p:spPr>
+        <p:txBody>
+          <a:bodyPr wrap="square" anchor="ctr">
+            <a:spAutoFit/>
+          </a:bodyPr>
+          <a:lstStyle/>
+          <a:p>
+            <a:pPr algn="ctr">
+              <a:spcAft>
+                <a:spcPts val="367"/>
+              </a:spcAft>
+            </a:pPr>
+            <a:r>
+              <a:rPr sz="1050" b="1">
+                <a:solidFill>
+                  <a:srgbClr val="E8A83C"/>
+                </a:solidFill>
+                <a:latin typeface="Noto Sans CJK JP"/>
+                <a:ea typeface="Noto Sans CJK JP"/>
+              </a:rPr>
+              <a:t>1 日</a:t>
+            </a:r>
+          </a:p>
+        </p:txBody>
+      </p:sp>
+      <p:sp>
+        <p:nvSpPr>
+          <p:cNvPr id="16" name="Rectangle 15"/>
+          <p:cNvSpPr/>
+          <p:nvPr/>
+        </p:nvSpPr>
+        <p:spPr>
+          <a:xfrm>
+            <a:off x="320040" y="2619756"/>
+            <a:ext cx="1051560" cy="466344"/>
+          </a:xfrm>
+          <a:prstGeom prst="rect">
+            <a:avLst/>
+          </a:prstGeom>
+          <a:solidFill>
+            <a:srgbClr val="2B2440"/>
+          </a:solidFill>
+          <a:ln>
+            <a:noFill/>
+          </a:ln>
+          <a:effectLst/>
+        </p:spPr>
+        <p:style>
+          <a:lnRef idx="1">
+            <a:schemeClr val="accent1"/>
+          </a:lnRef>
+          <a:fillRef idx="3">
+            <a:schemeClr val="accent1"/>
+          </a:fillRef>
+          <a:effectRef idx="2">
+            <a:schemeClr val="accent1"/>
+          </a:effectRef>
+          <a:fontRef idx="minor">
+            <a:schemeClr val="lt1"/>
+          </a:fontRef>
+        </p:style>
+        <p:txBody>
+          <a:bodyPr rtlCol="0" anchor="ctr"/>
+          <a:lstStyle/>
+          <a:p>
+            <a:pPr algn="ctr"/>
+          </a:p>
+        </p:txBody>
+      </p:sp>
+      <p:sp>
+        <p:nvSpPr>
+          <p:cNvPr id="17" name="TextBox 16"/>
+          <p:cNvSpPr txBox="1"/>
+          <p:nvPr/>
+        </p:nvSpPr>
+        <p:spPr>
+          <a:xfrm>
+            <a:off x="320040" y="2619756"/>
+            <a:ext cx="1051560" cy="466344"/>
+          </a:xfrm>
+          <a:prstGeom prst="rect">
+            <a:avLst/>
+          </a:prstGeom>
+          <a:noFill/>
+        </p:spPr>
+        <p:txBody>
+          <a:bodyPr wrap="square" anchor="ctr">
+            <a:spAutoFit/>
+          </a:bodyPr>
+          <a:lstStyle/>
+          <a:p>
+            <a:pPr algn="ctr">
+              <a:spcAft>
+                <a:spcPts val="384"/>
+              </a:spcAft>
+            </a:pPr>
+            <a:r>
+              <a:rPr sz="1100" b="1">
+                <a:solidFill>
+                  <a:srgbClr val="F2EFE6"/>
+                </a:solidFill>
+                <a:latin typeface="Noto Sans CJK JP"/>
+                <a:ea typeface="Noto Sans CJK JP"/>
+              </a:rPr>
+              <a:t>Day 2〜3</a:t>
+            </a:r>
+          </a:p>
+        </p:txBody>
+      </p:sp>
+      <p:sp>
+        <p:nvSpPr>
+          <p:cNvPr id="18" name="Rectangle 17"/>
+          <p:cNvSpPr/>
+          <p:nvPr/>
+        </p:nvSpPr>
+        <p:spPr>
+          <a:xfrm>
+            <a:off x="1417320" y="2619756"/>
+            <a:ext cx="4983480" cy="466344"/>
+          </a:xfrm>
+          <a:prstGeom prst="rect">
+            <a:avLst/>
+          </a:prstGeom>
+          <a:solidFill>
+            <a:srgbClr val="221C33"/>
+          </a:solidFill>
+          <a:ln>
+            <a:noFill/>
+          </a:ln>
+          <a:effectLst/>
+        </p:spPr>
+        <p:style>
+          <a:lnRef idx="1">
+            <a:schemeClr val="accent1"/>
+          </a:lnRef>
+          <a:fillRef idx="3">
+            <a:schemeClr val="accent1"/>
+          </a:fillRef>
+          <a:effectRef idx="2">
+            <a:schemeClr val="accent1"/>
+          </a:effectRef>
+          <a:fontRef idx="minor">
+            <a:schemeClr val="lt1"/>
+          </a:fontRef>
+        </p:style>
+        <p:txBody>
+          <a:bodyPr rtlCol="0" anchor="ctr"/>
+          <a:lstStyle/>
+          <a:p>
+            <a:pPr algn="ctr"/>
+          </a:p>
+        </p:txBody>
+      </p:sp>
+      <p:sp>
+        <p:nvSpPr>
+          <p:cNvPr id="19" name="TextBox 18"/>
+          <p:cNvSpPr txBox="1"/>
+          <p:nvPr/>
+        </p:nvSpPr>
+        <p:spPr>
+          <a:xfrm>
+            <a:off x="1527048" y="2619756"/>
+            <a:ext cx="4846320" cy="466344"/>
+          </a:xfrm>
+          <a:prstGeom prst="rect">
+            <a:avLst/>
+          </a:prstGeom>
+          <a:noFill/>
+        </p:spPr>
+        <p:txBody>
+          <a:bodyPr wrap="square" anchor="ctr">
+            <a:spAutoFit/>
+          </a:bodyPr>
+          <a:lstStyle/>
+          <a:p>
+            <a:pPr algn="l">
+              <a:spcAft>
+                <a:spcPts val="367"/>
+              </a:spcAft>
+            </a:pPr>
+            <a:r>
+              <a:rPr sz="1050" b="0">
+                <a:solidFill>
+                  <a:srgbClr val="F2EFE6"/>
+                </a:solidFill>
+                <a:latin typeface="Noto Sans CJK JP"/>
+                <a:ea typeface="Noto Sans CJK JP"/>
+              </a:rPr>
+              <a:t>仕様の自動起案(スペック・演出体系)→ 人の承認</a:t>
+            </a:r>
+          </a:p>
+        </p:txBody>
+      </p:sp>
+      <p:sp>
+        <p:nvSpPr>
+          <p:cNvPr id="20" name="Rectangle 19"/>
+          <p:cNvSpPr/>
+          <p:nvPr/>
+        </p:nvSpPr>
+        <p:spPr>
+          <a:xfrm>
+            <a:off x="6446520" y="2619756"/>
+            <a:ext cx="685800" cy="466344"/>
+          </a:xfrm>
+          <a:prstGeom prst="rect">
+            <a:avLst/>
+          </a:prstGeom>
+          <a:solidFill>
+            <a:srgbClr val="2B2440"/>
+          </a:solidFill>
+          <a:ln>
+            <a:noFill/>
+          </a:ln>
+          <a:effectLst/>
+        </p:spPr>
+        <p:style>
+          <a:lnRef idx="1">
+            <a:schemeClr val="accent1"/>
+          </a:lnRef>
+          <a:fillRef idx="3">
+            <a:schemeClr val="accent1"/>
+          </a:fillRef>
+          <a:effectRef idx="2">
+            <a:schemeClr val="accent1"/>
+          </a:effectRef>
+          <a:fontRef idx="minor">
+            <a:schemeClr val="lt1"/>
+          </a:fontRef>
+        </p:style>
+        <p:txBody>
+          <a:bodyPr rtlCol="0" anchor="ctr"/>
+          <a:lstStyle/>
+          <a:p>
+            <a:pPr algn="ctr"/>
+          </a:p>
+        </p:txBody>
+      </p:sp>
+      <p:sp>
+        <p:nvSpPr>
+          <p:cNvPr id="21" name="TextBox 20"/>
+          <p:cNvSpPr txBox="1"/>
+          <p:nvPr/>
+        </p:nvSpPr>
+        <p:spPr>
+          <a:xfrm>
+            <a:off x="6446520" y="2619756"/>
+            <a:ext cx="685800" cy="466344"/>
+          </a:xfrm>
+          <a:prstGeom prst="rect">
+            <a:avLst/>
+          </a:prstGeom>
+          <a:noFill/>
+        </p:spPr>
+        <p:txBody>
+          <a:bodyPr wrap="square" anchor="ctr">
+            <a:spAutoFit/>
+          </a:bodyPr>
+          <a:lstStyle/>
+          <a:p>
+            <a:pPr algn="ctr">
+              <a:spcAft>
+                <a:spcPts val="367"/>
+              </a:spcAft>
+            </a:pPr>
+            <a:r>
+              <a:rPr sz="1050" b="1">
+                <a:solidFill>
+                  <a:srgbClr val="E8A83C"/>
+                </a:solidFill>
+                <a:latin typeface="Noto Sans CJK JP"/>
+                <a:ea typeface="Noto Sans CJK JP"/>
+              </a:rPr>
+              <a:t>1〜2 日</a:t>
+            </a:r>
+          </a:p>
+        </p:txBody>
+      </p:sp>
+      <p:sp>
+        <p:nvSpPr>
+          <p:cNvPr id="22" name="Rectangle 21"/>
+          <p:cNvSpPr/>
+          <p:nvPr/>
+        </p:nvSpPr>
+        <p:spPr>
+          <a:xfrm>
+            <a:off x="320040" y="3136392"/>
+            <a:ext cx="1051560" cy="466344"/>
+          </a:xfrm>
+          <a:prstGeom prst="rect">
+            <a:avLst/>
+          </a:prstGeom>
+          <a:solidFill>
+            <a:srgbClr val="C0302E"/>
+          </a:solidFill>
+          <a:ln>
+            <a:noFill/>
+          </a:ln>
+          <a:effectLst/>
+        </p:spPr>
+        <p:style>
+          <a:lnRef idx="1">
+            <a:schemeClr val="accent1"/>
+          </a:lnRef>
+          <a:fillRef idx="3">
+            <a:schemeClr val="accent1"/>
+          </a:fillRef>
+          <a:effectRef idx="2">
+            <a:schemeClr val="accent1"/>
+          </a:effectRef>
+          <a:fontRef idx="minor">
+            <a:schemeClr val="lt1"/>
+          </a:fontRef>
+        </p:style>
+        <p:txBody>
+          <a:bodyPr rtlCol="0" anchor="ctr"/>
+          <a:lstStyle/>
+          <a:p>
+            <a:pPr algn="ctr"/>
+          </a:p>
+        </p:txBody>
+      </p:sp>
+      <p:sp>
+        <p:nvSpPr>
+          <p:cNvPr id="23" name="TextBox 22"/>
+          <p:cNvSpPr txBox="1"/>
+          <p:nvPr/>
+        </p:nvSpPr>
+        <p:spPr>
+          <a:xfrm>
+            <a:off x="320040" y="3136392"/>
+            <a:ext cx="1051560" cy="466344"/>
+          </a:xfrm>
+          <a:prstGeom prst="rect">
+            <a:avLst/>
+          </a:prstGeom>
+          <a:noFill/>
+        </p:spPr>
+        <p:txBody>
+          <a:bodyPr wrap="square" anchor="ctr">
+            <a:spAutoFit/>
+          </a:bodyPr>
+          <a:lstStyle/>
+          <a:p>
+            <a:pPr algn="ctr">
+              <a:spcAft>
+                <a:spcPts val="384"/>
+              </a:spcAft>
+            </a:pPr>
+            <a:r>
+              <a:rPr sz="1100" b="1">
+                <a:solidFill>
+                  <a:srgbClr val="F2EFE6"/>
+                </a:solidFill>
+                <a:latin typeface="Noto Sans CJK JP"/>
+                <a:ea typeface="Noto Sans CJK JP"/>
+              </a:rPr>
+              <a:t>Day 3〜5</a:t>
+            </a:r>
+          </a:p>
+        </p:txBody>
+      </p:sp>
+      <p:sp>
+        <p:nvSpPr>
+          <p:cNvPr id="24" name="Rectangle 23"/>
+          <p:cNvSpPr/>
+          <p:nvPr/>
+        </p:nvSpPr>
+        <p:spPr>
+          <a:xfrm>
+            <a:off x="1417320" y="3136392"/>
+            <a:ext cx="4983480" cy="466344"/>
+          </a:xfrm>
+          <a:prstGeom prst="rect">
+            <a:avLst/>
+          </a:prstGeom>
+          <a:solidFill>
+            <a:srgbClr val="221C33"/>
+          </a:solidFill>
+          <a:ln>
+            <a:noFill/>
+          </a:ln>
+          <a:effectLst/>
+        </p:spPr>
+        <p:style>
+          <a:lnRef idx="1">
+            <a:schemeClr val="accent1"/>
+          </a:lnRef>
+          <a:fillRef idx="3">
+            <a:schemeClr val="accent1"/>
+          </a:fillRef>
+          <a:effectRef idx="2">
+            <a:schemeClr val="accent1"/>
+          </a:effectRef>
+          <a:fontRef idx="minor">
+            <a:schemeClr val="lt1"/>
+          </a:fontRef>
+        </p:style>
+        <p:txBody>
+          <a:bodyPr rtlCol="0" anchor="ctr"/>
+          <a:lstStyle/>
+          <a:p>
+            <a:pPr algn="ctr"/>
+          </a:p>
+        </p:txBody>
+      </p:sp>
+      <p:sp>
+        <p:nvSpPr>
+          <p:cNvPr id="25" name="TextBox 24"/>
+          <p:cNvSpPr txBox="1"/>
+          <p:nvPr/>
+        </p:nvSpPr>
+        <p:spPr>
+          <a:xfrm>
+            <a:off x="1527048" y="3136392"/>
+            <a:ext cx="4846320" cy="466344"/>
+          </a:xfrm>
+          <a:prstGeom prst="rect">
+            <a:avLst/>
+          </a:prstGeom>
+          <a:noFill/>
+        </p:spPr>
+        <p:txBody>
+          <a:bodyPr wrap="square" anchor="ctr">
+            <a:spAutoFit/>
+          </a:bodyPr>
+          <a:lstStyle/>
+          <a:p>
+            <a:pPr algn="l">
+              <a:spcAft>
+                <a:spcPts val="367"/>
+              </a:spcAft>
+            </a:pPr>
+            <a:r>
+              <a:rPr sz="1050" b="0">
+                <a:solidFill>
+                  <a:srgbClr val="F2EFE6"/>
+                </a:solidFill>
+                <a:latin typeface="Noto Sans CJK JP"/>
+                <a:ea typeface="Noto Sans CJK JP"/>
+              </a:rPr>
+              <a:t>ゲームロジック実装(テンプレへのパラメータ差し替え)+ 網羅テスト・出玉シミュレーション</a:t>
+            </a:r>
+          </a:p>
+        </p:txBody>
+      </p:sp>
+      <p:sp>
+        <p:nvSpPr>
+          <p:cNvPr id="26" name="Rectangle 25"/>
+          <p:cNvSpPr/>
+          <p:nvPr/>
+        </p:nvSpPr>
+        <p:spPr>
+          <a:xfrm>
+            <a:off x="6446520" y="3136392"/>
+            <a:ext cx="685800" cy="466344"/>
+          </a:xfrm>
+          <a:prstGeom prst="rect">
+            <a:avLst/>
+          </a:prstGeom>
+          <a:solidFill>
+            <a:srgbClr val="2B2440"/>
+          </a:solidFill>
+          <a:ln>
+            <a:noFill/>
+          </a:ln>
+          <a:effectLst/>
+        </p:spPr>
+        <p:style>
+          <a:lnRef idx="1">
+            <a:schemeClr val="accent1"/>
+          </a:lnRef>
+          <a:fillRef idx="3">
+            <a:schemeClr val="accent1"/>
+          </a:fillRef>
+          <a:effectRef idx="2">
+            <a:schemeClr val="accent1"/>
+          </a:effectRef>
+          <a:fontRef idx="minor">
+            <a:schemeClr val="lt1"/>
+          </a:fontRef>
+        </p:style>
+        <p:txBody>
+          <a:bodyPr rtlCol="0" anchor="ctr"/>
+          <a:lstStyle/>
+          <a:p>
+            <a:pPr algn="ctr"/>
+          </a:p>
+        </p:txBody>
+      </p:sp>
+      <p:sp>
+        <p:nvSpPr>
+          <p:cNvPr id="27" name="TextBox 26"/>
+          <p:cNvSpPr txBox="1"/>
+          <p:nvPr/>
+        </p:nvSpPr>
+        <p:spPr>
+          <a:xfrm>
+            <a:off x="6446520" y="3136392"/>
+            <a:ext cx="685800" cy="466344"/>
+          </a:xfrm>
+          <a:prstGeom prst="rect">
+            <a:avLst/>
+          </a:prstGeom>
+          <a:noFill/>
+        </p:spPr>
+        <p:txBody>
+          <a:bodyPr wrap="square" anchor="ctr">
+            <a:spAutoFit/>
+          </a:bodyPr>
+          <a:lstStyle/>
+          <a:p>
+            <a:pPr algn="ctr">
+              <a:spcAft>
+                <a:spcPts val="367"/>
+              </a:spcAft>
+            </a:pPr>
+            <a:r>
+              <a:rPr sz="1050" b="1">
+                <a:solidFill>
+                  <a:srgbClr val="E8A83C"/>
+                </a:solidFill>
+                <a:latin typeface="Noto Sans CJK JP"/>
+                <a:ea typeface="Noto Sans CJK JP"/>
+              </a:rPr>
+              <a:t>2 日</a:t>
+            </a:r>
+          </a:p>
+        </p:txBody>
+      </p:sp>
+      <p:sp>
+        <p:nvSpPr>
+          <p:cNvPr id="28" name="Rectangle 27"/>
+          <p:cNvSpPr/>
+          <p:nvPr/>
+        </p:nvSpPr>
+        <p:spPr>
+          <a:xfrm>
+            <a:off x="320040" y="3653028"/>
+            <a:ext cx="1051560" cy="466344"/>
+          </a:xfrm>
+          <a:prstGeom prst="rect">
+            <a:avLst/>
+          </a:prstGeom>
+          <a:solidFill>
+            <a:srgbClr val="2B2440"/>
+          </a:solidFill>
+          <a:ln>
+            <a:noFill/>
+          </a:ln>
+          <a:effectLst/>
+        </p:spPr>
+        <p:style>
+          <a:lnRef idx="1">
+            <a:schemeClr val="accent1"/>
+          </a:lnRef>
+          <a:fillRef idx="3">
+            <a:schemeClr val="accent1"/>
+          </a:fillRef>
+          <a:effectRef idx="2">
+            <a:schemeClr val="accent1"/>
+          </a:effectRef>
+          <a:fontRef idx="minor">
+            <a:schemeClr val="lt1"/>
+          </a:fontRef>
+        </p:style>
+        <p:txBody>
+          <a:bodyPr rtlCol="0" anchor="ctr"/>
+          <a:lstStyle/>
+          <a:p>
+            <a:pPr algn="ctr"/>
+          </a:p>
+        </p:txBody>
+      </p:sp>
+      <p:sp>
+        <p:nvSpPr>
+          <p:cNvPr id="29" name="TextBox 28"/>
+          <p:cNvSpPr txBox="1"/>
+          <p:nvPr/>
+        </p:nvSpPr>
+        <p:spPr>
+          <a:xfrm>
+            <a:off x="320040" y="3653028"/>
+            <a:ext cx="1051560" cy="466344"/>
+          </a:xfrm>
+          <a:prstGeom prst="rect">
+            <a:avLst/>
+          </a:prstGeom>
+          <a:noFill/>
+        </p:spPr>
+        <p:txBody>
+          <a:bodyPr wrap="square" anchor="ctr">
+            <a:spAutoFit/>
+          </a:bodyPr>
+          <a:lstStyle/>
+          <a:p>
+            <a:pPr algn="ctr">
+              <a:spcAft>
+                <a:spcPts val="384"/>
+              </a:spcAft>
+            </a:pPr>
+            <a:r>
+              <a:rPr sz="1100" b="1">
+                <a:solidFill>
+                  <a:srgbClr val="F2EFE6"/>
+                </a:solidFill>
+                <a:latin typeface="Noto Sans CJK JP"/>
+                <a:ea typeface="Noto Sans CJK JP"/>
+              </a:rPr>
+              <a:t>Day 3〜7</a:t>
+            </a:r>
+          </a:p>
+        </p:txBody>
+      </p:sp>
+      <p:sp>
+        <p:nvSpPr>
+          <p:cNvPr id="30" name="Rectangle 29"/>
+          <p:cNvSpPr/>
+          <p:nvPr/>
+        </p:nvSpPr>
+        <p:spPr>
+          <a:xfrm>
+            <a:off x="1417320" y="3653028"/>
+            <a:ext cx="4983480" cy="466344"/>
+          </a:xfrm>
+          <a:prstGeom prst="rect">
+            <a:avLst/>
+          </a:prstGeom>
+          <a:solidFill>
+            <a:srgbClr val="221C33"/>
+          </a:solidFill>
+          <a:ln>
+            <a:noFill/>
+          </a:ln>
+          <a:effectLst/>
+        </p:spPr>
+        <p:style>
+          <a:lnRef idx="1">
+            <a:schemeClr val="accent1"/>
+          </a:lnRef>
+          <a:fillRef idx="3">
+            <a:schemeClr val="accent1"/>
+          </a:fillRef>
+          <a:effectRef idx="2">
+            <a:schemeClr val="accent1"/>
+          </a:effectRef>
+          <a:fontRef idx="minor">
+            <a:schemeClr val="lt1"/>
+          </a:fontRef>
+        </p:style>
+        <p:txBody>
+          <a:bodyPr rtlCol="0" anchor="ctr"/>
+          <a:lstStyle/>
+          <a:p>
+            <a:pPr algn="ctr"/>
+          </a:p>
+        </p:txBody>
+      </p:sp>
+      <p:sp>
+        <p:nvSpPr>
+          <p:cNvPr id="31" name="TextBox 30"/>
+          <p:cNvSpPr txBox="1"/>
+          <p:nvPr/>
+        </p:nvSpPr>
+        <p:spPr>
+          <a:xfrm>
+            <a:off x="1527048" y="3653028"/>
+            <a:ext cx="4846320" cy="466344"/>
+          </a:xfrm>
+          <a:prstGeom prst="rect">
+            <a:avLst/>
+          </a:prstGeom>
+          <a:noFill/>
+        </p:spPr>
+        <p:txBody>
+          <a:bodyPr wrap="square" anchor="ctr">
+            <a:spAutoFit/>
+          </a:bodyPr>
+          <a:lstStyle/>
+          <a:p>
+            <a:pPr algn="l">
+              <a:spcAft>
+                <a:spcPts val="367"/>
+              </a:spcAft>
+            </a:pPr>
+            <a:r>
+              <a:rPr sz="1050" b="0">
+                <a:solidFill>
+                  <a:srgbClr val="F2EFE6"/>
+                </a:solidFill>
+                <a:latin typeface="Noto Sans CJK JP"/>
+                <a:ea typeface="Noto Sans CJK JP"/>
+              </a:rPr>
+              <a:t>演出素材の AI 生成・検品(ロジック実装と並行)</a:t>
+            </a:r>
+          </a:p>
+        </p:txBody>
+      </p:sp>
+      <p:sp>
+        <p:nvSpPr>
+          <p:cNvPr id="32" name="Rectangle 31"/>
+          <p:cNvSpPr/>
+          <p:nvPr/>
+        </p:nvSpPr>
+        <p:spPr>
+          <a:xfrm>
+            <a:off x="6446520" y="3653028"/>
+            <a:ext cx="685800" cy="466344"/>
+          </a:xfrm>
+          <a:prstGeom prst="rect">
+            <a:avLst/>
+          </a:prstGeom>
+          <a:solidFill>
+            <a:srgbClr val="2B2440"/>
+          </a:solidFill>
+          <a:ln>
+            <a:noFill/>
+          </a:ln>
+          <a:effectLst/>
+        </p:spPr>
+        <p:style>
+          <a:lnRef idx="1">
+            <a:schemeClr val="accent1"/>
+          </a:lnRef>
+          <a:fillRef idx="3">
+            <a:schemeClr val="accent1"/>
+          </a:fillRef>
+          <a:effectRef idx="2">
+            <a:schemeClr val="accent1"/>
+          </a:effectRef>
+          <a:fontRef idx="minor">
+            <a:schemeClr val="lt1"/>
+          </a:fontRef>
+        </p:style>
+        <p:txBody>
+          <a:bodyPr rtlCol="0" anchor="ctr"/>
+          <a:lstStyle/>
+          <a:p>
+            <a:pPr algn="ctr"/>
+          </a:p>
+        </p:txBody>
+      </p:sp>
+      <p:sp>
+        <p:nvSpPr>
+          <p:cNvPr id="33" name="TextBox 32"/>
+          <p:cNvSpPr txBox="1"/>
+          <p:nvPr/>
+        </p:nvSpPr>
+        <p:spPr>
+          <a:xfrm>
+            <a:off x="6446520" y="3653028"/>
+            <a:ext cx="685800" cy="466344"/>
+          </a:xfrm>
+          <a:prstGeom prst="rect">
+            <a:avLst/>
+          </a:prstGeom>
+          <a:noFill/>
+        </p:spPr>
+        <p:txBody>
+          <a:bodyPr wrap="square" anchor="ctr">
+            <a:spAutoFit/>
+          </a:bodyPr>
+          <a:lstStyle/>
+          <a:p>
+            <a:pPr algn="ctr">
+              <a:spcAft>
+                <a:spcPts val="367"/>
+              </a:spcAft>
+            </a:pPr>
+            <a:r>
+              <a:rPr sz="1050" b="1">
+                <a:solidFill>
+                  <a:srgbClr val="E8A83C"/>
+                </a:solidFill>
+                <a:latin typeface="Noto Sans CJK JP"/>
+                <a:ea typeface="Noto Sans CJK JP"/>
+              </a:rPr>
+              <a:t>3〜4 日</a:t>
+            </a:r>
+          </a:p>
+        </p:txBody>
+      </p:sp>
+      <p:sp>
+        <p:nvSpPr>
+          <p:cNvPr id="34" name="Rectangle 33"/>
+          <p:cNvSpPr/>
+          <p:nvPr/>
+        </p:nvSpPr>
+        <p:spPr>
+          <a:xfrm>
+            <a:off x="320040" y="4169664"/>
+            <a:ext cx="1051560" cy="466344"/>
+          </a:xfrm>
+          <a:prstGeom prst="rect">
+            <a:avLst/>
+          </a:prstGeom>
+          <a:solidFill>
+            <a:srgbClr val="C0302E"/>
+          </a:solidFill>
+          <a:ln>
+            <a:noFill/>
+          </a:ln>
+          <a:effectLst/>
+        </p:spPr>
+        <p:style>
+          <a:lnRef idx="1">
+            <a:schemeClr val="accent1"/>
+          </a:lnRef>
+          <a:fillRef idx="3">
+            <a:schemeClr val="accent1"/>
+          </a:fillRef>
+          <a:effectRef idx="2">
+            <a:schemeClr val="accent1"/>
+          </a:effectRef>
+          <a:fontRef idx="minor">
+            <a:schemeClr val="lt1"/>
+          </a:fontRef>
+        </p:style>
+        <p:txBody>
+          <a:bodyPr rtlCol="0" anchor="ctr"/>
+          <a:lstStyle/>
+          <a:p>
+            <a:pPr algn="ctr"/>
+          </a:p>
+        </p:txBody>
+      </p:sp>
+      <p:sp>
+        <p:nvSpPr>
+          <p:cNvPr id="35" name="TextBox 34"/>
+          <p:cNvSpPr txBox="1"/>
+          <p:nvPr/>
+        </p:nvSpPr>
+        <p:spPr>
+          <a:xfrm>
+            <a:off x="320040" y="4169664"/>
+            <a:ext cx="1051560" cy="466344"/>
+          </a:xfrm>
+          <a:prstGeom prst="rect">
+            <a:avLst/>
+          </a:prstGeom>
+          <a:noFill/>
+        </p:spPr>
+        <p:txBody>
+          <a:bodyPr wrap="square" anchor="ctr">
+            <a:spAutoFit/>
+          </a:bodyPr>
+          <a:lstStyle/>
+          <a:p>
+            <a:pPr algn="ctr">
+              <a:spcAft>
+                <a:spcPts val="384"/>
+              </a:spcAft>
+            </a:pPr>
+            <a:r>
+              <a:rPr sz="1100" b="1">
+                <a:solidFill>
+                  <a:srgbClr val="F2EFE6"/>
+                </a:solidFill>
+                <a:latin typeface="Noto Sans CJK JP"/>
+                <a:ea typeface="Noto Sans CJK JP"/>
+              </a:rPr>
+              <a:t>Day 8〜9</a:t>
+            </a:r>
+          </a:p>
+        </p:txBody>
+      </p:sp>
+      <p:sp>
+        <p:nvSpPr>
+          <p:cNvPr id="36" name="Rectangle 35"/>
+          <p:cNvSpPr/>
+          <p:nvPr/>
+        </p:nvSpPr>
+        <p:spPr>
+          <a:xfrm>
+            <a:off x="1417320" y="4169664"/>
+            <a:ext cx="4983480" cy="466344"/>
+          </a:xfrm>
+          <a:prstGeom prst="rect">
+            <a:avLst/>
+          </a:prstGeom>
+          <a:solidFill>
+            <a:srgbClr val="221C33"/>
+          </a:solidFill>
+          <a:ln>
+            <a:noFill/>
+          </a:ln>
+          <a:effectLst/>
+        </p:spPr>
+        <p:style>
+          <a:lnRef idx="1">
+            <a:schemeClr val="accent1"/>
+          </a:lnRef>
+          <a:fillRef idx="3">
+            <a:schemeClr val="accent1"/>
+          </a:fillRef>
+          <a:effectRef idx="2">
+            <a:schemeClr val="accent1"/>
+          </a:effectRef>
+          <a:fontRef idx="minor">
+            <a:schemeClr val="lt1"/>
+          </a:fontRef>
+        </p:style>
+        <p:txBody>
+          <a:bodyPr rtlCol="0" anchor="ctr"/>
+          <a:lstStyle/>
+          <a:p>
+            <a:pPr algn="ctr"/>
+          </a:p>
+        </p:txBody>
+      </p:sp>
+      <p:sp>
+        <p:nvSpPr>
+          <p:cNvPr id="37" name="TextBox 36"/>
+          <p:cNvSpPr txBox="1"/>
+          <p:nvPr/>
+        </p:nvSpPr>
+        <p:spPr>
+          <a:xfrm>
+            <a:off x="1527048" y="4169664"/>
+            <a:ext cx="4846320" cy="466344"/>
+          </a:xfrm>
+          <a:prstGeom prst="rect">
+            <a:avLst/>
+          </a:prstGeom>
+          <a:noFill/>
+        </p:spPr>
+        <p:txBody>
+          <a:bodyPr wrap="square" anchor="ctr">
+            <a:spAutoFit/>
+          </a:bodyPr>
+          <a:lstStyle/>
+          <a:p>
+            <a:pPr algn="l">
+              <a:spcAft>
+                <a:spcPts val="367"/>
+              </a:spcAft>
+            </a:pPr>
+            <a:r>
+              <a:rPr sz="1050" b="0">
+                <a:solidFill>
+                  <a:srgbClr val="F2EFE6"/>
+                </a:solidFill>
+                <a:latin typeface="Noto Sans CJK JP"/>
+                <a:ea typeface="Noto Sans CJK JP"/>
+              </a:rPr>
+              <a:t>Web アプリへ統合・通しの動作確認</a:t>
+            </a:r>
+          </a:p>
+        </p:txBody>
+      </p:sp>
+      <p:sp>
+        <p:nvSpPr>
+          <p:cNvPr id="38" name="Rectangle 37"/>
+          <p:cNvSpPr/>
+          <p:nvPr/>
+        </p:nvSpPr>
+        <p:spPr>
+          <a:xfrm>
+            <a:off x="6446520" y="4169664"/>
+            <a:ext cx="685800" cy="466344"/>
+          </a:xfrm>
+          <a:prstGeom prst="rect">
+            <a:avLst/>
+          </a:prstGeom>
+          <a:solidFill>
+            <a:srgbClr val="2B2440"/>
+          </a:solidFill>
+          <a:ln>
+            <a:noFill/>
+          </a:ln>
+          <a:effectLst/>
+        </p:spPr>
+        <p:style>
+          <a:lnRef idx="1">
+            <a:schemeClr val="accent1"/>
+          </a:lnRef>
+          <a:fillRef idx="3">
+            <a:schemeClr val="accent1"/>
+          </a:fillRef>
+          <a:effectRef idx="2">
+            <a:schemeClr val="accent1"/>
+          </a:effectRef>
+          <a:fontRef idx="minor">
+            <a:schemeClr val="lt1"/>
+          </a:fontRef>
+        </p:style>
+        <p:txBody>
+          <a:bodyPr rtlCol="0" anchor="ctr"/>
+          <a:lstStyle/>
+          <a:p>
+            <a:pPr algn="ctr"/>
+          </a:p>
+        </p:txBody>
+      </p:sp>
+      <p:sp>
+        <p:nvSpPr>
+          <p:cNvPr id="39" name="TextBox 38"/>
+          <p:cNvSpPr txBox="1"/>
+          <p:nvPr/>
+        </p:nvSpPr>
+        <p:spPr>
+          <a:xfrm>
+            <a:off x="6446520" y="4169664"/>
+            <a:ext cx="685800" cy="466344"/>
+          </a:xfrm>
+          <a:prstGeom prst="rect">
+            <a:avLst/>
+          </a:prstGeom>
+          <a:noFill/>
+        </p:spPr>
+        <p:txBody>
+          <a:bodyPr wrap="square" anchor="ctr">
+            <a:spAutoFit/>
+          </a:bodyPr>
+          <a:lstStyle/>
+          <a:p>
+            <a:pPr algn="ctr">
+              <a:spcAft>
+                <a:spcPts val="367"/>
+              </a:spcAft>
+            </a:pPr>
+            <a:r>
+              <a:rPr sz="1050" b="1">
+                <a:solidFill>
+                  <a:srgbClr val="E8A83C"/>
+                </a:solidFill>
+                <a:latin typeface="Noto Sans CJK JP"/>
+                <a:ea typeface="Noto Sans CJK JP"/>
+              </a:rPr>
+              <a:t>2 日</a:t>
+            </a:r>
+          </a:p>
+        </p:txBody>
+      </p:sp>
+      <p:sp>
+        <p:nvSpPr>
+          <p:cNvPr id="40" name="Rectangle 39"/>
+          <p:cNvSpPr/>
+          <p:nvPr/>
+        </p:nvSpPr>
+        <p:spPr>
+          <a:xfrm>
+            <a:off x="320040" y="4686300"/>
+            <a:ext cx="1051560" cy="466344"/>
+          </a:xfrm>
+          <a:prstGeom prst="rect">
+            <a:avLst/>
+          </a:prstGeom>
+          <a:solidFill>
+            <a:srgbClr val="2B2440"/>
+          </a:solidFill>
+          <a:ln>
+            <a:noFill/>
+          </a:ln>
+          <a:effectLst/>
+        </p:spPr>
+        <p:style>
+          <a:lnRef idx="1">
+            <a:schemeClr val="accent1"/>
+          </a:lnRef>
+          <a:fillRef idx="3">
+            <a:schemeClr val="accent1"/>
+          </a:fillRef>
+          <a:effectRef idx="2">
+            <a:schemeClr val="accent1"/>
+          </a:effectRef>
+          <a:fontRef idx="minor">
+            <a:schemeClr val="lt1"/>
+          </a:fontRef>
+        </p:style>
+        <p:txBody>
+          <a:bodyPr rtlCol="0" anchor="ctr"/>
+          <a:lstStyle/>
+          <a:p>
+            <a:pPr algn="ctr"/>
+          </a:p>
+        </p:txBody>
+      </p:sp>
+      <p:sp>
+        <p:nvSpPr>
+          <p:cNvPr id="41" name="TextBox 40"/>
+          <p:cNvSpPr txBox="1"/>
+          <p:nvPr/>
+        </p:nvSpPr>
+        <p:spPr>
+          <a:xfrm>
+            <a:off x="320040" y="4686300"/>
+            <a:ext cx="1051560" cy="466344"/>
+          </a:xfrm>
+          <a:prstGeom prst="rect">
+            <a:avLst/>
+          </a:prstGeom>
+          <a:noFill/>
+        </p:spPr>
+        <p:txBody>
+          <a:bodyPr wrap="square" anchor="ctr">
+            <a:spAutoFit/>
+          </a:bodyPr>
+          <a:lstStyle/>
+          <a:p>
+            <a:pPr algn="ctr">
+              <a:spcAft>
+                <a:spcPts val="384"/>
+              </a:spcAft>
+            </a:pPr>
+            <a:r>
+              <a:rPr sz="1100" b="1">
+                <a:solidFill>
+                  <a:srgbClr val="F2EFE6"/>
+                </a:solidFill>
+                <a:latin typeface="Noto Sans CJK JP"/>
+                <a:ea typeface="Noto Sans CJK JP"/>
+              </a:rPr>
+              <a:t>Day 10〜12</a:t>
+            </a:r>
+          </a:p>
+        </p:txBody>
+      </p:sp>
+      <p:sp>
+        <p:nvSpPr>
+          <p:cNvPr id="42" name="Rectangle 41"/>
+          <p:cNvSpPr/>
+          <p:nvPr/>
+        </p:nvSpPr>
+        <p:spPr>
+          <a:xfrm>
+            <a:off x="1417320" y="4686300"/>
+            <a:ext cx="4983480" cy="466344"/>
+          </a:xfrm>
+          <a:prstGeom prst="rect">
+            <a:avLst/>
+          </a:prstGeom>
+          <a:solidFill>
+            <a:srgbClr val="221C33"/>
+          </a:solidFill>
+          <a:ln>
+            <a:noFill/>
+          </a:ln>
+          <a:effectLst/>
+        </p:spPr>
+        <p:style>
+          <a:lnRef idx="1">
+            <a:schemeClr val="accent1"/>
+          </a:lnRef>
+          <a:fillRef idx="3">
+            <a:schemeClr val="accent1"/>
+          </a:fillRef>
+          <a:effectRef idx="2">
+            <a:schemeClr val="accent1"/>
+          </a:effectRef>
+          <a:fontRef idx="minor">
+            <a:schemeClr val="lt1"/>
+          </a:fontRef>
+        </p:style>
+        <p:txBody>
+          <a:bodyPr rtlCol="0" anchor="ctr"/>
+          <a:lstStyle/>
+          <a:p>
+            <a:pPr algn="ctr"/>
+          </a:p>
+        </p:txBody>
+      </p:sp>
+      <p:sp>
+        <p:nvSpPr>
+          <p:cNvPr id="43" name="TextBox 42"/>
+          <p:cNvSpPr txBox="1"/>
+          <p:nvPr/>
+        </p:nvSpPr>
+        <p:spPr>
+          <a:xfrm>
+            <a:off x="1527048" y="4686300"/>
+            <a:ext cx="4846320" cy="466344"/>
+          </a:xfrm>
+          <a:prstGeom prst="rect">
+            <a:avLst/>
+          </a:prstGeom>
+          <a:noFill/>
+        </p:spPr>
+        <p:txBody>
+          <a:bodyPr wrap="square" anchor="ctr">
+            <a:spAutoFit/>
+          </a:bodyPr>
+          <a:lstStyle/>
+          <a:p>
+            <a:pPr algn="l">
+              <a:spcAft>
+                <a:spcPts val="367"/>
+              </a:spcAft>
+            </a:pPr>
+            <a:r>
+              <a:rPr sz="1050" b="0">
+                <a:solidFill>
+                  <a:srgbClr val="F2EFE6"/>
+                </a:solidFill>
+                <a:latin typeface="Noto Sans CJK JP"/>
+                <a:ea typeface="Noto Sans CJK JP"/>
+              </a:rPr>
+              <a:t>実機向け変換(C/演出データテーブルの差し替え + 同値性検証)</a:t>
+            </a:r>
+          </a:p>
+        </p:txBody>
+      </p:sp>
+      <p:sp>
+        <p:nvSpPr>
+          <p:cNvPr id="44" name="Rectangle 43"/>
+          <p:cNvSpPr/>
+          <p:nvPr/>
+        </p:nvSpPr>
+        <p:spPr>
+          <a:xfrm>
+            <a:off x="6446520" y="4686300"/>
+            <a:ext cx="685800" cy="466344"/>
+          </a:xfrm>
+          <a:prstGeom prst="rect">
+            <a:avLst/>
+          </a:prstGeom>
+          <a:solidFill>
+            <a:srgbClr val="2B2440"/>
+          </a:solidFill>
+          <a:ln>
+            <a:noFill/>
+          </a:ln>
+          <a:effectLst/>
+        </p:spPr>
+        <p:style>
+          <a:lnRef idx="1">
+            <a:schemeClr val="accent1"/>
+          </a:lnRef>
+          <a:fillRef idx="3">
+            <a:schemeClr val="accent1"/>
+          </a:fillRef>
+          <a:effectRef idx="2">
+            <a:schemeClr val="accent1"/>
+          </a:effectRef>
+          <a:fontRef idx="minor">
+            <a:schemeClr val="lt1"/>
+          </a:fontRef>
+        </p:style>
+        <p:txBody>
+          <a:bodyPr rtlCol="0" anchor="ctr"/>
+          <a:lstStyle/>
+          <a:p>
+            <a:pPr algn="ctr"/>
+          </a:p>
+        </p:txBody>
+      </p:sp>
+      <p:sp>
+        <p:nvSpPr>
+          <p:cNvPr id="45" name="TextBox 44"/>
+          <p:cNvSpPr txBox="1"/>
+          <p:nvPr/>
+        </p:nvSpPr>
+        <p:spPr>
+          <a:xfrm>
+            <a:off x="6446520" y="4686300"/>
+            <a:ext cx="685800" cy="466344"/>
+          </a:xfrm>
+          <a:prstGeom prst="rect">
+            <a:avLst/>
+          </a:prstGeom>
+          <a:noFill/>
+        </p:spPr>
+        <p:txBody>
+          <a:bodyPr wrap="square" anchor="ctr">
+            <a:spAutoFit/>
+          </a:bodyPr>
+          <a:lstStyle/>
+          <a:p>
+            <a:pPr algn="ctr">
+              <a:spcAft>
+                <a:spcPts val="367"/>
+              </a:spcAft>
+            </a:pPr>
+            <a:r>
+              <a:rPr sz="1050" b="1">
+                <a:solidFill>
+                  <a:srgbClr val="E8A83C"/>
+                </a:solidFill>
+                <a:latin typeface="Noto Sans CJK JP"/>
+                <a:ea typeface="Noto Sans CJK JP"/>
+              </a:rPr>
+              <a:t>2〜3 日</a:t>
+            </a:r>
+          </a:p>
+        </p:txBody>
+      </p:sp>
+      <p:sp>
+        <p:nvSpPr>
+          <p:cNvPr id="46" name="Rectangle 45"/>
+          <p:cNvSpPr/>
+          <p:nvPr/>
+        </p:nvSpPr>
+        <p:spPr>
+          <a:xfrm>
+            <a:off x="320040" y="5202936"/>
+            <a:ext cx="1051560" cy="466344"/>
+          </a:xfrm>
+          <a:prstGeom prst="rect">
+            <a:avLst/>
+          </a:prstGeom>
+          <a:solidFill>
+            <a:srgbClr val="C0302E"/>
+          </a:solidFill>
+          <a:ln>
+            <a:noFill/>
+          </a:ln>
+          <a:effectLst/>
+        </p:spPr>
+        <p:style>
+          <a:lnRef idx="1">
+            <a:schemeClr val="accent1"/>
+          </a:lnRef>
+          <a:fillRef idx="3">
+            <a:schemeClr val="accent1"/>
+          </a:fillRef>
+          <a:effectRef idx="2">
+            <a:schemeClr val="accent1"/>
+          </a:effectRef>
+          <a:fontRef idx="minor">
+            <a:schemeClr val="lt1"/>
+          </a:fontRef>
+        </p:style>
+        <p:txBody>
+          <a:bodyPr rtlCol="0" anchor="ctr"/>
+          <a:lstStyle/>
+          <a:p>
+            <a:pPr algn="ctr"/>
+          </a:p>
+        </p:txBody>
+      </p:sp>
+      <p:sp>
+        <p:nvSpPr>
+          <p:cNvPr id="47" name="TextBox 46"/>
+          <p:cNvSpPr txBox="1"/>
+          <p:nvPr/>
+        </p:nvSpPr>
+        <p:spPr>
+          <a:xfrm>
+            <a:off x="320040" y="5202936"/>
+            <a:ext cx="1051560" cy="466344"/>
+          </a:xfrm>
+          <a:prstGeom prst="rect">
+            <a:avLst/>
+          </a:prstGeom>
+          <a:noFill/>
+        </p:spPr>
+        <p:txBody>
+          <a:bodyPr wrap="square" anchor="ctr">
+            <a:spAutoFit/>
+          </a:bodyPr>
+          <a:lstStyle/>
+          <a:p>
+            <a:pPr algn="ctr">
+              <a:spcAft>
+                <a:spcPts val="384"/>
+              </a:spcAft>
+            </a:pPr>
+            <a:r>
+              <a:rPr sz="1100" b="1">
+                <a:solidFill>
+                  <a:srgbClr val="F2EFE6"/>
+                </a:solidFill>
+                <a:latin typeface="Noto Sans CJK JP"/>
+                <a:ea typeface="Noto Sans CJK JP"/>
+              </a:rPr>
+              <a:t>Day 13〜15</a:t>
+            </a:r>
+          </a:p>
+        </p:txBody>
+      </p:sp>
+      <p:sp>
+        <p:nvSpPr>
+          <p:cNvPr id="48" name="Rectangle 47"/>
+          <p:cNvSpPr/>
+          <p:nvPr/>
+        </p:nvSpPr>
+        <p:spPr>
+          <a:xfrm>
+            <a:off x="1417320" y="5202936"/>
+            <a:ext cx="4983480" cy="466344"/>
+          </a:xfrm>
+          <a:prstGeom prst="rect">
+            <a:avLst/>
+          </a:prstGeom>
+          <a:solidFill>
+            <a:srgbClr val="221C33"/>
+          </a:solidFill>
+          <a:ln>
+            <a:noFill/>
+          </a:ln>
+          <a:effectLst/>
+        </p:spPr>
+        <p:style>
+          <a:lnRef idx="1">
+            <a:schemeClr val="accent1"/>
+          </a:lnRef>
+          <a:fillRef idx="3">
+            <a:schemeClr val="accent1"/>
+          </a:fillRef>
+          <a:effectRef idx="2">
+            <a:schemeClr val="accent1"/>
+          </a:effectRef>
+          <a:fontRef idx="minor">
+            <a:schemeClr val="lt1"/>
+          </a:fontRef>
+        </p:style>
+        <p:txBody>
+          <a:bodyPr rtlCol="0" anchor="ctr"/>
+          <a:lstStyle/>
+          <a:p>
+            <a:pPr algn="ctr"/>
+          </a:p>
+        </p:txBody>
+      </p:sp>
+      <p:sp>
+        <p:nvSpPr>
+          <p:cNvPr id="49" name="TextBox 48"/>
+          <p:cNvSpPr txBox="1"/>
+          <p:nvPr/>
+        </p:nvSpPr>
+        <p:spPr>
+          <a:xfrm>
+            <a:off x="1527048" y="5202936"/>
+            <a:ext cx="4846320" cy="466344"/>
+          </a:xfrm>
+          <a:prstGeom prst="rect">
+            <a:avLst/>
+          </a:prstGeom>
+          <a:noFill/>
+        </p:spPr>
+        <p:txBody>
+          <a:bodyPr wrap="square" anchor="ctr">
+            <a:spAutoFit/>
+          </a:bodyPr>
+          <a:lstStyle/>
+          <a:p>
+            <a:pPr algn="l">
+              <a:spcAft>
+                <a:spcPts val="367"/>
+              </a:spcAft>
+            </a:pPr>
+            <a:r>
+              <a:rPr sz="1050" b="0">
+                <a:solidFill>
+                  <a:srgbClr val="F2EFE6"/>
+                </a:solidFill>
+                <a:latin typeface="Noto Sans CJK JP"/>
+                <a:ea typeface="Noto Sans CJK JP"/>
+              </a:rPr>
+              <a:t>実機(評価ボード・筐体)への組込み・調整・プレゼンリハーサル</a:t>
+            </a:r>
+          </a:p>
+        </p:txBody>
+      </p:sp>
+      <p:sp>
+        <p:nvSpPr>
+          <p:cNvPr id="50" name="Rectangle 49"/>
+          <p:cNvSpPr/>
+          <p:nvPr/>
+        </p:nvSpPr>
+        <p:spPr>
+          <a:xfrm>
+            <a:off x="6446520" y="5202936"/>
+            <a:ext cx="685800" cy="466344"/>
+          </a:xfrm>
+          <a:prstGeom prst="rect">
+            <a:avLst/>
+          </a:prstGeom>
+          <a:solidFill>
+            <a:srgbClr val="2B2440"/>
+          </a:solidFill>
+          <a:ln>
+            <a:noFill/>
+          </a:ln>
+          <a:effectLst/>
+        </p:spPr>
+        <p:style>
+          <a:lnRef idx="1">
+            <a:schemeClr val="accent1"/>
+          </a:lnRef>
+          <a:fillRef idx="3">
+            <a:schemeClr val="accent1"/>
+          </a:fillRef>
+          <a:effectRef idx="2">
+            <a:schemeClr val="accent1"/>
+          </a:effectRef>
+          <a:fontRef idx="minor">
+            <a:schemeClr val="lt1"/>
+          </a:fontRef>
+        </p:style>
+        <p:txBody>
+          <a:bodyPr rtlCol="0" anchor="ctr"/>
+          <a:lstStyle/>
+          <a:p>
+            <a:pPr algn="ctr"/>
+          </a:p>
+        </p:txBody>
+      </p:sp>
+      <p:sp>
+        <p:nvSpPr>
+          <p:cNvPr id="51" name="TextBox 50"/>
+          <p:cNvSpPr txBox="1"/>
+          <p:nvPr/>
+        </p:nvSpPr>
+        <p:spPr>
+          <a:xfrm>
+            <a:off x="6446520" y="5202936"/>
+            <a:ext cx="685800" cy="466344"/>
+          </a:xfrm>
+          <a:prstGeom prst="rect">
+            <a:avLst/>
+          </a:prstGeom>
+          <a:noFill/>
+        </p:spPr>
+        <p:txBody>
+          <a:bodyPr wrap="square" anchor="ctr">
+            <a:spAutoFit/>
+          </a:bodyPr>
+          <a:lstStyle/>
+          <a:p>
+            <a:pPr algn="ctr">
+              <a:spcAft>
+                <a:spcPts val="367"/>
+              </a:spcAft>
+            </a:pPr>
+            <a:r>
+              <a:rPr sz="1050" b="1">
+                <a:solidFill>
+                  <a:srgbClr val="E8A83C"/>
+                </a:solidFill>
+                <a:latin typeface="Noto Sans CJK JP"/>
+                <a:ea typeface="Noto Sans CJK JP"/>
+              </a:rPr>
+              <a:t>2〜3 日</a:t>
+            </a:r>
+          </a:p>
+        </p:txBody>
+      </p:sp>
+      <p:sp>
+        <p:nvSpPr>
+          <p:cNvPr id="52" name="Rectangle 51"/>
+          <p:cNvSpPr/>
+          <p:nvPr/>
+        </p:nvSpPr>
+        <p:spPr>
+          <a:xfrm>
+            <a:off x="7315200" y="2103120"/>
+            <a:ext cx="4526280" cy="3566160"/>
+          </a:xfrm>
+          <a:prstGeom prst="rect">
+            <a:avLst/>
+          </a:prstGeom>
+          <a:solidFill>
+            <a:srgbClr val="221C33"/>
+          </a:solidFill>
+          <a:ln>
+            <a:noFill/>
+          </a:ln>
+          <a:effectLst/>
+        </p:spPr>
+        <p:style>
+          <a:lnRef idx="1">
+            <a:schemeClr val="accent1"/>
+          </a:lnRef>
+          <a:fillRef idx="3">
+            <a:schemeClr val="accent1"/>
+          </a:fillRef>
+          <a:effectRef idx="2">
+            <a:schemeClr val="accent1"/>
+          </a:effectRef>
+          <a:fontRef idx="minor">
+            <a:schemeClr val="lt1"/>
+          </a:fontRef>
+        </p:style>
+        <p:txBody>
+          <a:bodyPr rtlCol="0" anchor="ctr"/>
+          <a:lstStyle/>
+          <a:p>
+            <a:pPr algn="ctr"/>
+          </a:p>
+        </p:txBody>
+      </p:sp>
+      <p:sp>
+        <p:nvSpPr>
+          <p:cNvPr id="53" name="TextBox 52"/>
+          <p:cNvSpPr txBox="1"/>
+          <p:nvPr/>
+        </p:nvSpPr>
+        <p:spPr>
+          <a:xfrm>
+            <a:off x="7516368" y="2212848"/>
+            <a:ext cx="4160520" cy="3383280"/>
+          </a:xfrm>
+          <a:prstGeom prst="rect">
+            <a:avLst/>
+          </a:prstGeom>
+          <a:noFill/>
+        </p:spPr>
+        <p:txBody>
+          <a:bodyPr wrap="square" anchor="t">
+            <a:spAutoFit/>
+          </a:bodyPr>
+          <a:lstStyle/>
+          <a:p>
+            <a:pPr algn="l">
+              <a:spcAft>
+                <a:spcPts val="489"/>
+              </a:spcAft>
+            </a:pPr>
+            <a:r>
+              <a:rPr sz="1400" b="1">
+                <a:solidFill>
+                  <a:srgbClr val="D9B44A"/>
+                </a:solidFill>
+                <a:latin typeface="Noto Sans CJK JP"/>
+                <a:ea typeface="Noto Sans CJK JP"/>
+              </a:rPr>
+              <a:t>■ 2 週間を成立させる前提条件</a:t>
+            </a:r>
+          </a:p>
+          <a:p>
+            <a:pPr algn="l">
+              <a:spcAft>
+                <a:spcPts val="402"/>
+              </a:spcAft>
+            </a:pPr>
+            <a:r>
+              <a:rPr sz="1150" b="0">
+                <a:solidFill>
+                  <a:srgbClr val="F2EFE6"/>
+                </a:solidFill>
+                <a:latin typeface="Noto Sans CJK JP"/>
+                <a:ea typeface="Noto Sans CJK JP"/>
+              </a:rPr>
+              <a:t>・実機ハード一式(基板・リールユニット・筐体)は事前調達・動作確認済み(当日手配は不可。最大のリスク要因)</a:t>
+            </a:r>
+          </a:p>
+          <a:p>
+            <a:pPr algn="l">
+              <a:spcAft>
+                <a:spcPts val="402"/>
+              </a:spcAft>
+            </a:pPr>
+            <a:r>
+              <a:rPr sz="1150" b="0">
+                <a:solidFill>
+                  <a:srgbClr val="F2EFE6"/>
+                </a:solidFill>
+                <a:latin typeface="Noto Sans CJK JP"/>
+                <a:ea typeface="Noto Sans CJK JP"/>
+              </a:rPr>
+              <a:t>・①②のパイプラインを別題材で事前リハーサル済み(初回題材でのぶっつけ本番にしない)</a:t>
+            </a:r>
+          </a:p>
+          <a:p>
+            <a:pPr algn="l">
+              <a:spcAft>
+                <a:spcPts val="402"/>
+              </a:spcAft>
+            </a:pPr>
+            <a:r>
+              <a:rPr sz="1150" b="0">
+                <a:solidFill>
+                  <a:srgbClr val="F2EFE6"/>
+                </a:solidFill>
+                <a:latin typeface="Noto Sans CJK JP"/>
+                <a:ea typeface="Noto Sans CJK JP"/>
+              </a:rPr>
+              <a:t>・承認・検品(仕様承認・生成画像の監修)が即日レスポンス(律速は AI の生成時間ではなく人の往復)</a:t>
+            </a:r>
+          </a:p>
+          <a:p>
+            <a:pPr algn="l">
+              <a:spcAft>
+                <a:spcPts val="402"/>
+              </a:spcAft>
+            </a:pPr>
+            <a:r>
+              <a:rPr sz="1150" b="0">
+                <a:solidFill>
+                  <a:srgbClr val="F2EFE6"/>
+                </a:solidFill>
+                <a:latin typeface="Noto Sans CJK JP"/>
+                <a:ea typeface="Noto Sans CJK JP"/>
+              </a:rPr>
+              <a:t>・スコープを「肝」に固定(全演出・全モード・型式試験対応はプレゼン後の本開発で対応)</a:t>
+            </a:r>
+          </a:p>
+          <a:p>
+            <a:pPr algn="l">
+              <a:spcAft>
+                <a:spcPts val="402"/>
+              </a:spcAft>
+            </a:pPr>
+            <a:r>
+              <a:rPr sz="1150" b="0">
+                <a:solidFill>
+                  <a:srgbClr val="F2EFE6"/>
+                </a:solidFill>
+                <a:latin typeface="Noto Sans CJK JP"/>
+                <a:ea typeface="Noto Sans CJK JP"/>
+              </a:rPr>
+              <a:t>・生成リトライ(モデレーション・顔ドリフト検品)と実機固有の不具合切り分けに予備日を確保</a:t>
+            </a:r>
+          </a:p>
+        </p:txBody>
+      </p:sp>
+      <p:sp>
+        <p:nvSpPr>
+          <p:cNvPr id="54" name="Rectangle 53"/>
+          <p:cNvSpPr/>
+          <p:nvPr/>
+        </p:nvSpPr>
+        <p:spPr>
+          <a:xfrm>
+            <a:off x="320040" y="5806440"/>
+            <a:ext cx="11551615" cy="868680"/>
+          </a:xfrm>
+          <a:prstGeom prst="rect">
+            <a:avLst/>
+          </a:prstGeom>
+          <a:solidFill>
+            <a:srgbClr val="2B2440"/>
+          </a:solidFill>
+          <a:ln w="12700">
+            <a:solidFill>
+              <a:srgbClr val="D9B44A"/>
+            </a:solidFill>
+          </a:ln>
+          <a:effectLst/>
+        </p:spPr>
+        <p:style>
+          <a:lnRef idx="1">
+            <a:schemeClr val="accent1"/>
+          </a:lnRef>
+          <a:fillRef idx="3">
+            <a:schemeClr val="accent1"/>
+          </a:fillRef>
+          <a:effectRef idx="2">
+            <a:schemeClr val="accent1"/>
+          </a:effectRef>
+          <a:fontRef idx="minor">
+            <a:schemeClr val="lt1"/>
+          </a:fontRef>
+        </p:style>
+        <p:txBody>
+          <a:bodyPr rtlCol="0" anchor="ctr"/>
+          <a:lstStyle/>
+          <a:p>
+            <a:pPr algn="ctr"/>
+          </a:p>
+        </p:txBody>
+      </p:sp>
+      <p:sp>
+        <p:nvSpPr>
+          <p:cNvPr id="55" name="TextBox 54"/>
+          <p:cNvSpPr txBox="1"/>
+          <p:nvPr/>
+        </p:nvSpPr>
+        <p:spPr>
+          <a:xfrm>
+            <a:off x="548640" y="5870448"/>
+            <a:ext cx="11094415" cy="777240"/>
+          </a:xfrm>
+          <a:prstGeom prst="rect">
+            <a:avLst/>
+          </a:prstGeom>
+          <a:noFill/>
+        </p:spPr>
+        <p:txBody>
+          <a:bodyPr wrap="square" anchor="t">
+            <a:spAutoFit/>
+          </a:bodyPr>
+          <a:lstStyle/>
+          <a:p>
+            <a:pPr algn="l">
+              <a:spcAft>
+                <a:spcPts val="455"/>
+              </a:spcAft>
+            </a:pPr>
+            <a:r>
+              <a:rPr sz="1300" b="1">
+                <a:solidFill>
+                  <a:srgbClr val="E8A83C"/>
+                </a:solidFill>
+                <a:latin typeface="Noto Sans CJK JP"/>
+                <a:ea typeface="Noto Sans CJK JP"/>
+              </a:rPr>
+              <a:t>試算: 通算 約 10〜15 日。前提条件が揃えば「2 週間で肝が動く」は達成圏内(実働は並行処理する AI エージェント側でなく、承認往復と実機作業が律速)</a:t>
+            </a:r>
+          </a:p>
+          <a:p>
+            <a:pPr algn="l">
+              <a:spcAft>
+                <a:spcPts val="367"/>
+              </a:spcAft>
+            </a:pPr>
+            <a:r>
+              <a:rPr sz="1050" b="0">
+                <a:solidFill>
+                  <a:srgbClr val="B9B2C8"/>
+                </a:solidFill>
+                <a:latin typeface="Noto Sans CJK JP"/>
+                <a:ea typeface="Noto Sans CJK JP"/>
+              </a:rPr>
+              <a:t>※ 計画としては予備 1 週間を加えた 3 週間で組み、プレゼン日程には 2 週間 + バッファを見込むのが安全</a:t>
+            </a:r>
+          </a:p>
+        </p:txBody>
+      </p:sp>
+    </p:spTree>
+  </p:cSld>
+  <p:clrMapOvr>
+    <a:masterClrMapping/>
+  </p:clrMapOvr>
+</p:sld>
+</file>
+
+<file path=ppt/slides/slide11.xml><?xml version="1.0" encoding="utf-8"?>
+<p:sld xmlns:a="http://schemas.openxmlformats.org/drawingml/2006/main" xmlns:p="http://schemas.openxmlformats.org/presentationml/2006/main" xmlns:r="http://schemas.openxmlformats.org/officeDocument/2006/relationships">
+  <p:cSld>
+    <p:spTree>
+      <p:nvGrpSpPr>
+        <p:cNvPr id="1" name=""/>
+        <p:cNvGrpSpPr/>
+        <p:nvPr/>
+      </p:nvGrpSpPr>
+      <p:grpSpPr/>
+      <p:sp>
+        <p:nvSpPr>
+          <p:cNvPr id="2" name="Rectangle 1"/>
+          <p:cNvSpPr/>
+          <p:nvPr/>
+        </p:nvSpPr>
+        <p:spPr>
+          <a:xfrm>
+            <a:off x="0" y="0"/>
+            <a:ext cx="12191695" cy="6858000"/>
+          </a:xfrm>
+          <a:prstGeom prst="rect">
+            <a:avLst/>
+          </a:prstGeom>
+          <a:solidFill>
+            <a:srgbClr val="14101E"/>
+          </a:solidFill>
+          <a:ln>
+            <a:noFill/>
+          </a:ln>
+          <a:effectLst/>
+        </p:spPr>
+        <p:style>
+          <a:lnRef idx="1">
+            <a:schemeClr val="accent1"/>
+          </a:lnRef>
+          <a:fillRef idx="3">
+            <a:schemeClr val="accent1"/>
+          </a:fillRef>
+          <a:effectRef idx="2">
+            <a:schemeClr val="accent1"/>
+          </a:effectRef>
+          <a:fontRef idx="minor">
+            <a:schemeClr val="lt1"/>
+          </a:fontRef>
+        </p:style>
+        <p:txBody>
+          <a:bodyPr rtlCol="0" anchor="ctr"/>
+          <a:lstStyle/>
+          <a:p>
+            <a:pPr algn="ctr"/>
+          </a:p>
+        </p:txBody>
+      </p:sp>
+      <p:sp>
+        <p:nvSpPr>
+          <p:cNvPr id="3" name="Rectangle 2"/>
+          <p:cNvSpPr/>
+          <p:nvPr/>
+        </p:nvSpPr>
+        <p:spPr>
+          <a:xfrm>
+            <a:off x="0" y="0"/>
+            <a:ext cx="12191695" cy="841248"/>
+          </a:xfrm>
+          <a:prstGeom prst="rect">
+            <a:avLst/>
+          </a:prstGeom>
+          <a:solidFill>
+            <a:srgbClr val="221C33"/>
+          </a:solidFill>
+          <a:ln>
+            <a:noFill/>
+          </a:ln>
+          <a:effectLst/>
+        </p:spPr>
+        <p:style>
+          <a:lnRef idx="1">
+            <a:schemeClr val="accent1"/>
+          </a:lnRef>
+          <a:fillRef idx="3">
+            <a:schemeClr val="accent1"/>
+          </a:fillRef>
+          <a:effectRef idx="2">
+            <a:schemeClr val="accent1"/>
+          </a:effectRef>
+          <a:fontRef idx="minor">
+            <a:schemeClr val="lt1"/>
+          </a:fontRef>
+        </p:style>
+        <p:txBody>
+          <a:bodyPr rtlCol="0" anchor="ctr"/>
+          <a:lstStyle/>
+          <a:p>
+            <a:pPr algn="ctr"/>
+          </a:p>
+        </p:txBody>
+      </p:sp>
+      <p:sp>
+        <p:nvSpPr>
+          <p:cNvPr id="4" name="Rectangle 3"/>
+          <p:cNvSpPr/>
+          <p:nvPr/>
+        </p:nvSpPr>
+        <p:spPr>
+          <a:xfrm>
+            <a:off x="0" y="841248"/>
+            <a:ext cx="12191695" cy="31750"/>
+          </a:xfrm>
+          <a:prstGeom prst="rect">
+            <a:avLst/>
+          </a:prstGeom>
+          <a:solidFill>
+            <a:srgbClr val="D9B44A"/>
+          </a:solidFill>
+          <a:ln>
+            <a:noFill/>
+          </a:ln>
+          <a:effectLst/>
+        </p:spPr>
+        <p:style>
+          <a:lnRef idx="1">
+            <a:schemeClr val="accent1"/>
+          </a:lnRef>
+          <a:fillRef idx="3">
+            <a:schemeClr val="accent1"/>
+          </a:fillRef>
+          <a:effectRef idx="2">
+            <a:schemeClr val="accent1"/>
+          </a:effectRef>
+          <a:fontRef idx="minor">
+            <a:schemeClr val="lt1"/>
+          </a:fontRef>
+        </p:style>
+        <p:txBody>
+          <a:bodyPr rtlCol="0" anchor="ctr"/>
+          <a:lstStyle/>
+          <a:p>
+            <a:pPr algn="ctr"/>
+          </a:p>
+        </p:txBody>
+      </p:sp>
+      <p:sp>
+        <p:nvSpPr>
+          <p:cNvPr id="5" name="Rectangle 4"/>
+          <p:cNvSpPr/>
+          <p:nvPr/>
+        </p:nvSpPr>
+        <p:spPr>
+          <a:xfrm>
+            <a:off x="320040" y="164592"/>
+            <a:ext cx="63500" cy="512064"/>
+          </a:xfrm>
+          <a:prstGeom prst="rect">
+            <a:avLst/>
+          </a:prstGeom>
+          <a:solidFill>
+            <a:srgbClr val="C0302E"/>
+          </a:solidFill>
+          <a:ln>
+            <a:noFill/>
+          </a:ln>
+          <a:effectLst/>
+        </p:spPr>
+        <p:style>
+          <a:lnRef idx="1">
+            <a:schemeClr val="accent1"/>
+          </a:lnRef>
+          <a:fillRef idx="3">
+            <a:schemeClr val="accent1"/>
+          </a:fillRef>
+          <a:effectRef idx="2">
+            <a:schemeClr val="accent1"/>
+          </a:effectRef>
+          <a:fontRef idx="minor">
+            <a:schemeClr val="lt1"/>
+          </a:fontRef>
+        </p:style>
+        <p:txBody>
+          <a:bodyPr rtlCol="0" anchor="ctr"/>
+          <a:lstStyle/>
+          <a:p>
+            <a:pPr algn="ctr"/>
+          </a:p>
+        </p:txBody>
+      </p:sp>
+      <p:sp>
+        <p:nvSpPr>
+          <p:cNvPr id="6" name="TextBox 5"/>
+          <p:cNvSpPr txBox="1"/>
+          <p:nvPr/>
+        </p:nvSpPr>
+        <p:spPr>
+          <a:xfrm>
+            <a:off x="502920" y="73152"/>
+            <a:ext cx="9601200" cy="731520"/>
+          </a:xfrm>
+          <a:prstGeom prst="rect">
+            <a:avLst/>
+          </a:prstGeom>
+          <a:noFill/>
+        </p:spPr>
+        <p:txBody>
+          <a:bodyPr wrap="square" anchor="ctr">
+            <a:spAutoFit/>
+          </a:bodyPr>
+          <a:lstStyle/>
+          <a:p>
+            <a:pPr algn="l">
+              <a:spcAft>
+                <a:spcPts val="910"/>
+              </a:spcAft>
+            </a:pPr>
+            <a:r>
+              <a:rPr sz="2600" b="1">
+                <a:solidFill>
+                  <a:srgbClr val="D9B44A"/>
+                </a:solidFill>
+                <a:latin typeface="Noto Sans CJK JP"/>
+                <a:ea typeface="Noto Sans CJK JP"/>
+              </a:rPr>
               <a:t>まとめ</a:t>
             </a:r>
           </a:p>
@@ -3915,6 +6327,40 @@
                 <a:ea typeface="Noto Sans CJK JP"/>
               </a:rPr>
               <a:t>・C 言語 / アセンブラへの移植と実機 ROM 化(型式試験対応を見据えた設計)</a:t>
+            </a:r>
+          </a:p>
+          <a:p>
+            <a:pPr algn="l">
+              <a:spcAft>
+                <a:spcPts val="594"/>
+              </a:spcAft>
+            </a:pPr>
+            <a:r>
+              <a:rPr sz="1700" b="1">
+                <a:solidFill>
+                  <a:srgbClr val="D9B44A"/>
+                </a:solidFill>
+                <a:latin typeface="Noto Sans CJK JP"/>
+                <a:ea typeface="Noto Sans CJK JP"/>
+              </a:rPr>
+              <a:t>■ 最終目的(応用 ③)</a:t>
+            </a:r>
+          </a:p>
+          <a:p>
+            <a:pPr algn="l">
+              <a:spcAft>
+                <a:spcPts val="472"/>
+              </a:spcAft>
+            </a:pPr>
+            <a:r>
+              <a:rPr sz="1350" b="0">
+                <a:solidFill>
+                  <a:srgbClr val="F2EFE6"/>
+                </a:solidFill>
+                <a:latin typeface="Noto Sans CJK JP"/>
+                <a:ea typeface="Noto Sans CJK JP"/>
+              </a:rPr>
+              <a:t>・版権取得プレゼン時に実機デモを提示 — 素材受領から約 2 週間で「肝」が動く体制</a:t>
             </a:r>
           </a:p>
         </p:txBody>
